--- a/2025/LEC/05-1 Методы машинного обучения для анализа ВР.pptx
+++ b/2025/LEC/05-1 Методы машинного обучения для анализа ВР.pptx
@@ -5,7 +5,7 @@
     <p:sldMasterId id="2147483648" r:id="rId1"/>
   </p:sldMasterIdLst>
   <p:notesMasterIdLst>
-    <p:notesMasterId r:id="rId21"/>
+    <p:notesMasterId r:id="rId22"/>
   </p:notesMasterIdLst>
   <p:sldIdLst>
     <p:sldId id="256" r:id="rId2"/>
@@ -26,7 +26,8 @@
     <p:sldId id="279" r:id="rId17"/>
     <p:sldId id="273" r:id="rId18"/>
     <p:sldId id="277" r:id="rId19"/>
-    <p:sldId id="274" r:id="rId20"/>
+    <p:sldId id="280" r:id="rId20"/>
+    <p:sldId id="274" r:id="rId21"/>
   </p:sldIdLst>
   <p:sldSz cx="12192000" cy="6858000"/>
   <p:notesSz cx="6858000" cy="9144000"/>
@@ -241,7 +242,7 @@
           <a:p>
             <a:fld id="{803A9DE4-6CFD-4732-953B-EF950A6B3001}" type="datetimeFigureOut">
               <a:rPr lang="ru-RU" smtClean="0"/>
-              <a:t>11.08.2025</a:t>
+              <a:t>20.08.2025</a:t>
             </a:fld>
             <a:endParaRPr lang="ru-RU"/>
           </a:p>
@@ -1088,7 +1089,7 @@
           <a:p>
             <a:fld id="{43B237C4-111C-4636-B222-D785A341FF5A}" type="datetimeFigureOut">
               <a:rPr lang="ru-RU" smtClean="0"/>
-              <a:t>11.08.2025</a:t>
+              <a:t>20.08.2025</a:t>
             </a:fld>
             <a:endParaRPr lang="ru-RU"/>
           </a:p>
@@ -1256,7 +1257,7 @@
           <a:p>
             <a:fld id="{43B237C4-111C-4636-B222-D785A341FF5A}" type="datetimeFigureOut">
               <a:rPr lang="ru-RU" smtClean="0"/>
-              <a:t>11.08.2025</a:t>
+              <a:t>20.08.2025</a:t>
             </a:fld>
             <a:endParaRPr lang="ru-RU"/>
           </a:p>
@@ -1434,7 +1435,7 @@
           <a:p>
             <a:fld id="{43B237C4-111C-4636-B222-D785A341FF5A}" type="datetimeFigureOut">
               <a:rPr lang="ru-RU" smtClean="0"/>
-              <a:t>11.08.2025</a:t>
+              <a:t>20.08.2025</a:t>
             </a:fld>
             <a:endParaRPr lang="ru-RU"/>
           </a:p>
@@ -1602,7 +1603,7 @@
           <a:p>
             <a:fld id="{43B237C4-111C-4636-B222-D785A341FF5A}" type="datetimeFigureOut">
               <a:rPr lang="ru-RU" smtClean="0"/>
-              <a:t>11.08.2025</a:t>
+              <a:t>20.08.2025</a:t>
             </a:fld>
             <a:endParaRPr lang="ru-RU"/>
           </a:p>
@@ -1847,7 +1848,7 @@
           <a:p>
             <a:fld id="{43B237C4-111C-4636-B222-D785A341FF5A}" type="datetimeFigureOut">
               <a:rPr lang="ru-RU" smtClean="0"/>
-              <a:t>11.08.2025</a:t>
+              <a:t>20.08.2025</a:t>
             </a:fld>
             <a:endParaRPr lang="ru-RU"/>
           </a:p>
@@ -2076,7 +2077,7 @@
           <a:p>
             <a:fld id="{43B237C4-111C-4636-B222-D785A341FF5A}" type="datetimeFigureOut">
               <a:rPr lang="ru-RU" smtClean="0"/>
-              <a:t>11.08.2025</a:t>
+              <a:t>20.08.2025</a:t>
             </a:fld>
             <a:endParaRPr lang="ru-RU"/>
           </a:p>
@@ -2440,7 +2441,7 @@
           <a:p>
             <a:fld id="{43B237C4-111C-4636-B222-D785A341FF5A}" type="datetimeFigureOut">
               <a:rPr lang="ru-RU" smtClean="0"/>
-              <a:t>11.08.2025</a:t>
+              <a:t>20.08.2025</a:t>
             </a:fld>
             <a:endParaRPr lang="ru-RU"/>
           </a:p>
@@ -2557,7 +2558,7 @@
           <a:p>
             <a:fld id="{43B237C4-111C-4636-B222-D785A341FF5A}" type="datetimeFigureOut">
               <a:rPr lang="ru-RU" smtClean="0"/>
-              <a:t>11.08.2025</a:t>
+              <a:t>20.08.2025</a:t>
             </a:fld>
             <a:endParaRPr lang="ru-RU"/>
           </a:p>
@@ -2652,7 +2653,7 @@
           <a:p>
             <a:fld id="{43B237C4-111C-4636-B222-D785A341FF5A}" type="datetimeFigureOut">
               <a:rPr lang="ru-RU" smtClean="0"/>
-              <a:t>11.08.2025</a:t>
+              <a:t>20.08.2025</a:t>
             </a:fld>
             <a:endParaRPr lang="ru-RU"/>
           </a:p>
@@ -2927,7 +2928,7 @@
           <a:p>
             <a:fld id="{43B237C4-111C-4636-B222-D785A341FF5A}" type="datetimeFigureOut">
               <a:rPr lang="ru-RU" smtClean="0"/>
-              <a:t>11.08.2025</a:t>
+              <a:t>20.08.2025</a:t>
             </a:fld>
             <a:endParaRPr lang="ru-RU"/>
           </a:p>
@@ -3179,7 +3180,7 @@
           <a:p>
             <a:fld id="{43B237C4-111C-4636-B222-D785A341FF5A}" type="datetimeFigureOut">
               <a:rPr lang="ru-RU" smtClean="0"/>
-              <a:t>11.08.2025</a:t>
+              <a:t>20.08.2025</a:t>
             </a:fld>
             <a:endParaRPr lang="ru-RU"/>
           </a:p>
@@ -3390,7 +3391,7 @@
           <a:p>
             <a:fld id="{43B237C4-111C-4636-B222-D785A341FF5A}" type="datetimeFigureOut">
               <a:rPr lang="ru-RU" smtClean="0"/>
-              <a:t>11.08.2025</a:t>
+              <a:t>20.08.2025</a:t>
             </a:fld>
             <a:endParaRPr lang="ru-RU"/>
           </a:p>
@@ -3884,12 +3885,17 @@
         </p:spPr>
         <p:txBody>
           <a:bodyPr>
-            <a:normAutofit/>
+            <a:noAutofit/>
           </a:bodyPr>
           <a:lstStyle/>
           <a:p>
             <a:r>
-              <a:rPr lang="ru-RU" sz="3600" dirty="0"/>
+              <a:rPr lang="ru-RU" sz="3200" b="1" dirty="0">
+                <a:solidFill>
+                  <a:srgbClr val="0D47A1"/>
+                </a:solidFill>
+                <a:latin typeface="system-ui"/>
+              </a:rPr>
               <a:t>Разница между задачами регрессии и предсказания</a:t>
             </a:r>
           </a:p>
@@ -3905,7 +3911,7 @@
             <p:ph idx="1"/>
             <p:extLst>
               <p:ext uri="{D42A27DB-BD31-4B8C-83A1-F6EECF244321}">
-                <p14:modId xmlns:p14="http://schemas.microsoft.com/office/powerpoint/2010/main" val="3329227898"/>
+                <p14:modId xmlns:p14="http://schemas.microsoft.com/office/powerpoint/2010/main" val="1116386460"/>
               </p:ext>
             </p:extLst>
           </p:nvPr>
@@ -3949,6 +3955,7 @@
                     <a:bodyPr/>
                     <a:lstStyle/>
                     <a:p>
+                      <a:pPr algn="ctr"/>
                       <a:r>
                         <a:rPr lang="ru-RU" dirty="0"/>
                         <a:t>Задача</a:t>
@@ -3962,6 +3969,7 @@
                     <a:bodyPr/>
                     <a:lstStyle/>
                     <a:p>
+                      <a:pPr algn="ctr"/>
                       <a:r>
                         <a:rPr lang="ru-RU" dirty="0"/>
                         <a:t>Табличная</a:t>
@@ -3980,9 +3988,14 @@
                     <a:bodyPr/>
                     <a:lstStyle/>
                     <a:p>
+                      <a:pPr algn="ctr"/>
+                      <a:r>
+                        <a:rPr lang="ru-RU" dirty="0" smtClean="0"/>
+                        <a:t>Предсказания </a:t>
+                      </a:r>
                       <a:r>
                         <a:rPr lang="ru-RU" dirty="0"/>
-                        <a:t>предсказания ВР</a:t>
+                        <a:t>ВР</a:t>
                       </a:r>
                     </a:p>
                   </a:txBody>
@@ -4000,6 +4013,7 @@
                     <a:bodyPr/>
                     <a:lstStyle/>
                     <a:p>
+                      <a:pPr algn="ctr"/>
                       <a:r>
                         <a:rPr lang="ru-RU" dirty="0"/>
                         <a:t>Задача</a:t>
@@ -4013,6 +4027,7 @@
                     <a:bodyPr/>
                     <a:lstStyle/>
                     <a:p>
+                      <a:pPr algn="ctr"/>
                       <a:r>
                         <a:rPr lang="ru-RU" dirty="0"/>
                         <a:t>Регрессия (</a:t>
@@ -4039,6 +4054,7 @@
                     <a:bodyPr/>
                     <a:lstStyle/>
                     <a:p>
+                      <a:pPr algn="ctr"/>
                       <a:r>
                         <a:rPr lang="ru-RU" dirty="0"/>
                         <a:t>Предсказание (следующее</a:t>
@@ -4072,6 +4088,7 @@
                     <a:bodyPr/>
                     <a:lstStyle/>
                     <a:p>
+                      <a:pPr algn="ctr"/>
                       <a:r>
                         <a:rPr lang="ru-RU" dirty="0"/>
                         <a:t>Признаки</a:t>
@@ -4085,6 +4102,7 @@
                     <a:bodyPr/>
                     <a:lstStyle/>
                     <a:p>
+                      <a:pPr algn="ctr"/>
                       <a:r>
                         <a:rPr lang="ru-RU" dirty="0"/>
                         <a:t>Колонки – признаки</a:t>
@@ -4098,6 +4116,7 @@
                     <a:bodyPr/>
                     <a:lstStyle/>
                     <a:p>
+                      <a:pPr algn="ctr"/>
                       <a:r>
                         <a:rPr lang="ru-RU" dirty="0"/>
                         <a:t>ВР – это не признаки, признаки надо выделить</a:t>
@@ -4118,6 +4137,7 @@
                     <a:bodyPr/>
                     <a:lstStyle/>
                     <a:p>
+                      <a:pPr algn="ctr"/>
                       <a:r>
                         <a:rPr lang="ru-RU" dirty="0" err="1"/>
                         <a:t>Фичи-инженеринг</a:t>
@@ -4132,6 +4152,7 @@
                     <a:bodyPr/>
                     <a:lstStyle/>
                     <a:p>
+                      <a:pPr algn="ctr"/>
                       <a:r>
                         <a:rPr lang="ru-RU" dirty="0"/>
                         <a:t>Отбор, трансформация</a:t>
@@ -4157,7 +4178,7 @@
                     <a:bodyPr/>
                     <a:lstStyle/>
                     <a:p>
-                      <a:pPr marL="0" marR="0" indent="0" algn="l" defTabSz="914400" rtl="0" eaLnBrk="1" fontAlgn="auto" latinLnBrk="0" hangingPunct="1">
+                      <a:pPr marL="0" marR="0" indent="0" algn="ctr" defTabSz="914400" rtl="0" eaLnBrk="1" fontAlgn="auto" latinLnBrk="0" hangingPunct="1">
                         <a:lnSpc>
                           <a:spcPct val="100000"/>
                         </a:lnSpc>
@@ -4203,6 +4224,7 @@
                     <a:bodyPr/>
                     <a:lstStyle/>
                     <a:p>
+                      <a:pPr algn="ctr"/>
                       <a:r>
                         <a:rPr lang="ru-RU" dirty="0"/>
                         <a:t>Кросс-</a:t>
@@ -4221,6 +4243,7 @@
                     <a:bodyPr/>
                     <a:lstStyle/>
                     <a:p>
+                      <a:pPr algn="ctr"/>
                       <a:r>
                         <a:rPr lang="ru-RU" dirty="0"/>
                         <a:t>Случайная</a:t>
@@ -4251,6 +4274,7 @@
                     <a:bodyPr/>
                     <a:lstStyle/>
                     <a:p>
+                      <a:pPr algn="ctr"/>
                       <a:r>
                         <a:rPr lang="en-US" dirty="0"/>
                         <a:t>Walking</a:t>
@@ -4288,6 +4312,7 @@
                     <a:bodyPr/>
                     <a:lstStyle/>
                     <a:p>
+                      <a:pPr algn="ctr"/>
                       <a:r>
                         <a:rPr lang="ru-RU" dirty="0"/>
                         <a:t>Паттерны</a:t>
@@ -4301,6 +4326,7 @@
                     <a:bodyPr/>
                     <a:lstStyle/>
                     <a:p>
+                      <a:pPr algn="ctr"/>
                       <a:r>
                         <a:rPr lang="ru-RU" dirty="0"/>
                         <a:t>Паттерн</a:t>
@@ -4327,6 +4353,7 @@
                     <a:bodyPr/>
                     <a:lstStyle/>
                     <a:p>
+                      <a:pPr algn="ctr"/>
                       <a:r>
                         <a:rPr lang="ru-RU" dirty="0"/>
                         <a:t>Последовательный паттерн (его еще нужно преобразовать в </a:t>
@@ -4456,11 +4483,18 @@
           </a:xfrm>
         </p:spPr>
         <p:txBody>
-          <a:bodyPr/>
+          <a:bodyPr>
+            <a:normAutofit/>
+          </a:bodyPr>
           <a:lstStyle/>
           <a:p>
             <a:r>
-              <a:rPr lang="ru-RU" dirty="0"/>
+              <a:rPr lang="ru-RU" sz="4000" b="1" dirty="0">
+                <a:solidFill>
+                  <a:srgbClr val="0D47A1"/>
+                </a:solidFill>
+                <a:latin typeface="system-ui"/>
+              </a:rPr>
               <a:t>Замечания к процедуре редукции</a:t>
             </a:r>
           </a:p>
@@ -5845,22 +5879,21 @@
           </a:xfrm>
         </p:spPr>
         <p:txBody>
-          <a:bodyPr/>
+          <a:bodyPr>
+            <a:normAutofit/>
+          </a:bodyPr>
           <a:lstStyle/>
           <a:p>
             <a:pPr lvl="0"/>
             <a:r>
-              <a:rPr lang="ru-RU" dirty="0">
+              <a:rPr lang="ru-RU" sz="4000" b="1" dirty="0">
                 <a:solidFill>
-                  <a:srgbClr val="2C2C36"/>
+                  <a:srgbClr val="0D47A1"/>
                 </a:solidFill>
-                <a:latin typeface="+mn-lt"/>
+                <a:latin typeface="system-ui"/>
               </a:rPr>
               <a:t>Замечания</a:t>
             </a:r>
-            <a:endParaRPr lang="ru-RU" dirty="0">
-              <a:latin typeface="+mn-lt"/>
-            </a:endParaRPr>
           </a:p>
         </p:txBody>
       </p:sp>
@@ -6164,25 +6197,33 @@
         </p:spPr>
         <p:txBody>
           <a:bodyPr>
-            <a:normAutofit fontScale="90000"/>
+            <a:noAutofit/>
           </a:bodyPr>
           <a:lstStyle/>
           <a:p>
             <a:r>
-              <a:rPr lang="ru-RU" dirty="0">
+              <a:rPr lang="ru-RU" sz="3600" b="1" dirty="0">
                 <a:solidFill>
-                  <a:srgbClr val="2C2C36"/>
+                  <a:srgbClr val="0D47A1"/>
                 </a:solidFill>
-                <a:latin typeface="+mn-lt"/>
+                <a:latin typeface="system-ui"/>
               </a:rPr>
               <a:t>Замечания. </a:t>
             </a:r>
             <a:r>
-              <a:rPr lang="ru-RU" altLang="ru-RU" dirty="0"/>
+              <a:rPr lang="ru-RU" altLang="ru-RU" sz="3600" b="1" dirty="0">
+                <a:solidFill>
+                  <a:srgbClr val="0D47A1"/>
+                </a:solidFill>
+                <a:latin typeface="system-ui"/>
+              </a:rPr>
               <a:t>Календарные признаки могут быть </a:t>
             </a:r>
-            <a:endParaRPr lang="ru-RU" dirty="0">
-              <a:latin typeface="+mn-lt"/>
+            <a:endParaRPr lang="ru-RU" sz="3600" b="1" dirty="0">
+              <a:solidFill>
+                <a:srgbClr val="0D47A1"/>
+              </a:solidFill>
+              <a:latin typeface="system-ui"/>
             </a:endParaRPr>
           </a:p>
         </p:txBody>
@@ -6702,7 +6743,7 @@
         <p:spPr>
           <a:xfrm>
             <a:off x="5265489" y="6406612"/>
-            <a:ext cx="6097836" cy="369332"/>
+            <a:ext cx="6097836" cy="307777"/>
           </a:xfrm>
           <a:prstGeom prst="rect">
             <a:avLst/>
@@ -6715,35 +6756,36 @@
           </a:bodyPr>
           <a:lstStyle/>
           <a:p>
-            <a:r>
-              <a:rPr lang="ru-RU" dirty="0" err="1"/>
+            <a:pPr algn="r"/>
+            <a:r>
+              <a:rPr lang="ru-RU" sz="1400" dirty="0" err="1"/>
               <a:t>https</a:t>
             </a:r>
             <a:r>
-              <a:rPr lang="ru-RU" dirty="0"/>
+              <a:rPr lang="ru-RU" sz="1400" dirty="0"/>
               <a:t>://</a:t>
             </a:r>
             <a:r>
-              <a:rPr lang="ru-RU" dirty="0" err="1"/>
+              <a:rPr lang="ru-RU" sz="1400" dirty="0" err="1"/>
               <a:t>skforecast.org</a:t>
             </a:r>
             <a:r>
-              <a:rPr lang="ru-RU" dirty="0"/>
+              <a:rPr lang="ru-RU" sz="1400" dirty="0"/>
               <a:t>/0.16.0/</a:t>
             </a:r>
             <a:r>
-              <a:rPr lang="ru-RU" dirty="0" err="1"/>
+              <a:rPr lang="ru-RU" sz="1400" dirty="0" err="1"/>
               <a:t>user_guides</a:t>
             </a:r>
             <a:r>
-              <a:rPr lang="ru-RU" dirty="0"/>
+              <a:rPr lang="ru-RU" sz="1400" dirty="0"/>
               <a:t>/</a:t>
             </a:r>
             <a:r>
-              <a:rPr lang="ru-RU" dirty="0" err="1"/>
+              <a:rPr lang="ru-RU" sz="1400" dirty="0" err="1"/>
               <a:t>calendar-features</a:t>
             </a:r>
-            <a:endParaRPr lang="ru-RU" dirty="0"/>
+            <a:endParaRPr lang="ru-RU" sz="1400" dirty="0"/>
           </a:p>
         </p:txBody>
       </p:sp>
@@ -6823,7 +6865,7 @@
             <p:ph idx="1"/>
             <p:extLst>
               <p:ext uri="{D42A27DB-BD31-4B8C-83A1-F6EECF244321}">
-                <p14:modId xmlns:p14="http://schemas.microsoft.com/office/powerpoint/2010/main" val="1216354750"/>
+                <p14:modId xmlns:p14="http://schemas.microsoft.com/office/powerpoint/2010/main" val="2434609510"/>
               </p:ext>
             </p:extLst>
           </p:nvPr>
@@ -6867,6 +6909,7 @@
                     <a:bodyPr/>
                     <a:lstStyle/>
                     <a:p>
+                      <a:pPr algn="ctr"/>
                       <a:r>
                         <a:rPr lang="ru-RU" sz="2000" dirty="0"/>
                         <a:t>Задача</a:t>
@@ -6880,6 +6923,7 @@
                     <a:bodyPr/>
                     <a:lstStyle/>
                     <a:p>
+                      <a:pPr algn="ctr"/>
                       <a:r>
                         <a:rPr lang="ru-RU" sz="2000" dirty="0"/>
                         <a:t>Стат. методы</a:t>
@@ -6893,6 +6937,7 @@
                     <a:bodyPr/>
                     <a:lstStyle/>
                     <a:p>
+                      <a:pPr algn="ctr"/>
                       <a:r>
                         <a:rPr lang="en-US" sz="2000" dirty="0"/>
                         <a:t>ML</a:t>
@@ -6922,6 +6967,7 @@
                     <a:bodyPr/>
                     <a:lstStyle/>
                     <a:p>
+                      <a:pPr algn="ctr"/>
                       <a:r>
                         <a:rPr lang="ru-RU" sz="2000" dirty="0"/>
                         <a:t>примеры</a:t>
@@ -6935,6 +6981,7 @@
                     <a:bodyPr/>
                     <a:lstStyle/>
                     <a:p>
+                      <a:pPr algn="ctr"/>
                       <a:r>
                         <a:rPr lang="en-US" sz="2000" dirty="0"/>
                         <a:t>ARIMA,</a:t>
@@ -6953,6 +7000,7 @@
                     <a:bodyPr/>
                     <a:lstStyle/>
                     <a:p>
+                      <a:pPr algn="ctr"/>
                       <a:r>
                         <a:rPr lang="en-US" sz="2000" dirty="0" err="1"/>
                         <a:t>XGBoost</a:t>
@@ -6982,6 +7030,7 @@
                     <a:bodyPr/>
                     <a:lstStyle/>
                     <a:p>
+                      <a:pPr algn="ctr"/>
                       <a:r>
                         <a:rPr lang="ru-RU" sz="2000" dirty="0"/>
                         <a:t>Стационарность</a:t>
@@ -7000,6 +7049,7 @@
                     <a:bodyPr/>
                     <a:lstStyle/>
                     <a:p>
+                      <a:pPr algn="ctr"/>
                       <a:r>
                         <a:rPr lang="ru-RU" sz="2000" dirty="0"/>
                         <a:t>Очень важна</a:t>
@@ -7013,6 +7063,7 @@
                     <a:bodyPr/>
                     <a:lstStyle/>
                     <a:p>
+                      <a:pPr algn="ctr"/>
                       <a:r>
                         <a:rPr lang="ru-RU" sz="2000" dirty="0"/>
                         <a:t>Только</a:t>
@@ -7038,6 +7089,7 @@
                     <a:bodyPr/>
                     <a:lstStyle/>
                     <a:p>
+                      <a:pPr algn="ctr"/>
                       <a:r>
                         <a:rPr lang="ru-RU" sz="2000" dirty="0"/>
                         <a:t>Интерпретируемость</a:t>
@@ -7051,6 +7103,7 @@
                     <a:bodyPr/>
                     <a:lstStyle/>
                     <a:p>
+                      <a:pPr algn="ctr"/>
                       <a:r>
                         <a:rPr lang="ru-RU" sz="2000" dirty="0"/>
                         <a:t>Высокая</a:t>
@@ -7064,6 +7117,7 @@
                     <a:bodyPr/>
                     <a:lstStyle/>
                     <a:p>
+                      <a:pPr algn="ctr"/>
                       <a:r>
                         <a:rPr lang="ru-RU" sz="2000" dirty="0"/>
                         <a:t>средняя</a:t>
@@ -7084,6 +7138,7 @@
                     <a:bodyPr/>
                     <a:lstStyle/>
                     <a:p>
+                      <a:pPr algn="ctr"/>
                       <a:r>
                         <a:rPr lang="ru-RU" sz="2000" dirty="0"/>
                         <a:t>Риск переобучения</a:t>
@@ -7097,6 +7152,7 @@
                     <a:bodyPr/>
                     <a:lstStyle/>
                     <a:p>
+                      <a:pPr algn="ctr"/>
                       <a:r>
                         <a:rPr lang="ru-RU" sz="2000" dirty="0"/>
                         <a:t>Низкий,  при кросс-</a:t>
@@ -7115,7 +7171,7 @@
                     <a:bodyPr/>
                     <a:lstStyle/>
                     <a:p>
-                      <a:pPr marL="0" marR="0" indent="0" algn="l" defTabSz="914400" rtl="0" eaLnBrk="1" fontAlgn="auto" latinLnBrk="0" hangingPunct="1">
+                      <a:pPr marL="0" marR="0" indent="0" algn="ctr" defTabSz="914400" rtl="0" eaLnBrk="1" fontAlgn="auto" latinLnBrk="0" hangingPunct="1">
                         <a:lnSpc>
                           <a:spcPct val="100000"/>
                         </a:lnSpc>
@@ -7152,6 +7208,7 @@
                     <a:bodyPr/>
                     <a:lstStyle/>
                     <a:p>
+                      <a:pPr algn="ctr"/>
                       <a:r>
                         <a:rPr lang="ru-RU" sz="2000" dirty="0"/>
                         <a:t>Экзогенные факторы</a:t>
@@ -7165,6 +7222,7 @@
                     <a:bodyPr/>
                     <a:lstStyle/>
                     <a:p>
+                      <a:pPr algn="ctr"/>
                       <a:r>
                         <a:rPr lang="ru-RU" sz="2000" dirty="0"/>
                         <a:t>Только 1</a:t>
@@ -7183,6 +7241,7 @@
                     <a:bodyPr/>
                     <a:lstStyle/>
                     <a:p>
+                      <a:pPr algn="ctr"/>
                       <a:r>
                         <a:rPr lang="ru-RU" sz="2000" dirty="0"/>
                         <a:t>Главное чтобы не было</a:t>
@@ -7208,6 +7267,7 @@
                     <a:bodyPr/>
                     <a:lstStyle/>
                     <a:p>
+                      <a:pPr algn="ctr"/>
                       <a:r>
                         <a:rPr lang="ru-RU" sz="2000" dirty="0"/>
                         <a:t>Многомерные ВР</a:t>
@@ -7221,6 +7281,7 @@
                     <a:bodyPr/>
                     <a:lstStyle/>
                     <a:p>
+                      <a:pPr algn="ctr"/>
                       <a:r>
                         <a:rPr lang="ru-RU" sz="2000" dirty="0"/>
                         <a:t>Сложно,</a:t>
@@ -7239,6 +7300,7 @@
                     <a:bodyPr/>
                     <a:lstStyle/>
                     <a:p>
+                      <a:pPr algn="ctr"/>
                       <a:r>
                         <a:rPr lang="ru-RU" sz="2000" dirty="0"/>
                         <a:t>Возможны</a:t>
@@ -7264,6 +7326,7 @@
                     <a:bodyPr/>
                     <a:lstStyle/>
                     <a:p>
+                      <a:pPr algn="ctr"/>
                       <a:r>
                         <a:rPr lang="ru-RU" sz="2000" dirty="0"/>
                         <a:t>Иерархические ВР</a:t>
@@ -7277,6 +7340,7 @@
                     <a:bodyPr/>
                     <a:lstStyle/>
                     <a:p>
+                      <a:pPr algn="ctr"/>
                       <a:r>
                         <a:rPr lang="ru-RU" sz="2000" dirty="0"/>
                         <a:t>Сложно учесть</a:t>
@@ -7290,6 +7354,7 @@
                     <a:bodyPr/>
                     <a:lstStyle/>
                     <a:p>
+                      <a:pPr algn="ctr"/>
                       <a:r>
                         <a:rPr lang="ru-RU" sz="2000" dirty="0"/>
                         <a:t>да</a:t>
@@ -7310,6 +7375,7 @@
                     <a:bodyPr/>
                     <a:lstStyle/>
                     <a:p>
+                      <a:pPr algn="ctr"/>
                       <a:r>
                         <a:rPr lang="ru-RU" sz="2000" dirty="0"/>
                         <a:t>Горизонт прогноза</a:t>
@@ -7323,6 +7389,7 @@
                     <a:bodyPr/>
                     <a:lstStyle/>
                     <a:p>
+                      <a:pPr algn="ctr"/>
                       <a:r>
                         <a:rPr lang="ru-RU" sz="2000" dirty="0"/>
                         <a:t>Небольшой</a:t>
@@ -7336,6 +7403,7 @@
                     <a:bodyPr/>
                     <a:lstStyle/>
                     <a:p>
+                      <a:pPr algn="ctr"/>
                       <a:r>
                         <a:rPr lang="ru-RU" sz="2000" dirty="0"/>
                         <a:t>Средний</a:t>
@@ -7356,6 +7424,7 @@
                     <a:bodyPr/>
                     <a:lstStyle/>
                     <a:p>
+                      <a:pPr algn="ctr"/>
                       <a:r>
                         <a:rPr lang="ru-RU" sz="2000" dirty="0" err="1"/>
                         <a:t>Автомтаизация</a:t>
@@ -7373,6 +7442,7 @@
                     <a:bodyPr/>
                     <a:lstStyle/>
                     <a:p>
+                      <a:pPr algn="ctr"/>
                       <a:r>
                         <a:rPr lang="ru-RU" sz="2000" dirty="0"/>
                         <a:t>Средняя</a:t>
@@ -7386,6 +7456,7 @@
                     <a:bodyPr/>
                     <a:lstStyle/>
                     <a:p>
+                      <a:pPr algn="ctr"/>
                       <a:r>
                         <a:rPr lang="ru-RU" sz="2000" dirty="0"/>
                         <a:t>Высокая</a:t>
@@ -7474,873 +7545,1659 @@
           </a:p>
         </p:txBody>
       </p:sp>
-      <p:graphicFrame>
-        <p:nvGraphicFramePr>
-          <p:cNvPr id="4" name="Объект 3">
-            <a:extLst>
-              <a:ext uri="{FF2B5EF4-FFF2-40B4-BE49-F238E27FC236}">
-                <a16:creationId xmlns:a16="http://schemas.microsoft.com/office/drawing/2014/main" id="{4C6D77A8-018D-4F69-E0AB-665CC72D36BE}"/>
-              </a:ext>
-            </a:extLst>
-          </p:cNvPr>
-          <p:cNvGraphicFramePr>
-            <a:graphicFrameLocks noGrp="1"/>
-          </p:cNvGraphicFramePr>
-          <p:nvPr>
-            <p:ph idx="1"/>
-            <p:extLst>
-              <p:ext uri="{D42A27DB-BD31-4B8C-83A1-F6EECF244321}">
-                <p14:modId xmlns:p14="http://schemas.microsoft.com/office/powerpoint/2010/main" val="1105262803"/>
-              </p:ext>
-            </p:extLst>
-          </p:nvPr>
-        </p:nvGraphicFramePr>
-        <p:xfrm>
-          <a:off x="233818" y="791584"/>
-          <a:ext cx="11724363" cy="5877560"/>
-        </p:xfrm>
-        <a:graphic>
-          <a:graphicData uri="http://schemas.openxmlformats.org/drawingml/2006/table">
-            <a:tbl>
-              <a:tblPr firstRow="1" bandRow="1">
-                <a:tableStyleId>{5C22544A-7EE6-4342-B048-85BDC9FD1C3A}</a:tableStyleId>
-              </a:tblPr>
-              <a:tblGrid>
-                <a:gridCol w="1993450">
-                  <a:extLst>
-                    <a:ext uri="{9D8B030D-6E8A-4147-A177-3AD203B41FA5}">
-                      <a16:colId xmlns:a16="http://schemas.microsoft.com/office/drawing/2014/main" val="2003674582"/>
-                    </a:ext>
-                  </a:extLst>
-                </a:gridCol>
-                <a:gridCol w="3543055">
-                  <a:extLst>
-                    <a:ext uri="{9D8B030D-6E8A-4147-A177-3AD203B41FA5}">
-                      <a16:colId xmlns:a16="http://schemas.microsoft.com/office/drawing/2014/main" val="3372195085"/>
-                    </a:ext>
-                  </a:extLst>
-                </a:gridCol>
-                <a:gridCol w="6187858">
-                  <a:extLst>
-                    <a:ext uri="{9D8B030D-6E8A-4147-A177-3AD203B41FA5}">
-                      <a16:colId xmlns:a16="http://schemas.microsoft.com/office/drawing/2014/main" val="2406795206"/>
-                    </a:ext>
-                  </a:extLst>
-                </a:gridCol>
-              </a:tblGrid>
-              <a:tr h="241170">
-                <a:tc>
-                  <a:txBody>
-                    <a:bodyPr/>
-                    <a:lstStyle/>
-                    <a:p>
-                      <a:endParaRPr lang="ru-RU" dirty="0"/>
-                    </a:p>
-                  </a:txBody>
-                  <a:tcPr/>
-                </a:tc>
-                <a:tc>
-                  <a:txBody>
-                    <a:bodyPr/>
-                    <a:lstStyle/>
-                    <a:p>
-                      <a:r>
-                        <a:rPr lang="ru-RU" dirty="0"/>
-                        <a:t>Проблемы</a:t>
-                      </a:r>
-                    </a:p>
-                  </a:txBody>
-                  <a:tcPr/>
-                </a:tc>
-                <a:tc>
-                  <a:txBody>
-                    <a:bodyPr/>
-                    <a:lstStyle/>
-                    <a:p>
-                      <a:r>
-                        <a:rPr lang="ru-RU" dirty="0"/>
-                        <a:t>Решения </a:t>
-                      </a:r>
-                    </a:p>
-                  </a:txBody>
-                  <a:tcPr/>
-                </a:tc>
+      <mc:AlternateContent xmlns:mc="http://schemas.openxmlformats.org/markup-compatibility/2006">
+        <mc:Choice xmlns:a14="http://schemas.microsoft.com/office/drawing/2010/main" Requires="a14">
+          <p:graphicFrame>
+            <p:nvGraphicFramePr>
+              <p:cNvPr id="4" name="Объект 3">
                 <a:extLst>
-                  <a:ext uri="{0D108BD9-81ED-4DB2-BD59-A6C34878D82A}">
-                    <a16:rowId xmlns:a16="http://schemas.microsoft.com/office/drawing/2014/main" val="601287456"/>
+                  <a:ext uri="{FF2B5EF4-FFF2-40B4-BE49-F238E27FC236}">
+                    <a16:creationId xmlns:a16="http://schemas.microsoft.com/office/drawing/2014/main" id="{4C6D77A8-018D-4F69-E0AB-665CC72D36BE}"/>
                   </a:ext>
                 </a:extLst>
-              </a:tr>
-              <a:tr h="489185">
-                <a:tc>
-                  <a:txBody>
-                    <a:bodyPr/>
-                    <a:lstStyle/>
-                    <a:p>
-                      <a:r>
-                        <a:rPr lang="ru-RU" sz="2000" dirty="0"/>
-                        <a:t>Заполнение пропусков</a:t>
-                      </a:r>
-                    </a:p>
-                  </a:txBody>
-                  <a:tcPr/>
-                </a:tc>
-                <a:tc>
-                  <a:txBody>
-                    <a:bodyPr/>
-                    <a:lstStyle/>
-                    <a:p>
-                      <a:pPr marL="0" marR="0" lvl="0" indent="0" algn="l" defTabSz="914400" rtl="0" eaLnBrk="1" fontAlgn="auto" latinLnBrk="0" hangingPunct="1">
-                        <a:lnSpc>
-                          <a:spcPct val="100000"/>
-                        </a:lnSpc>
-                        <a:spcBef>
-                          <a:spcPts val="0"/>
-                        </a:spcBef>
-                        <a:spcAft>
-                          <a:spcPts val="0"/>
-                        </a:spcAft>
-                        <a:buClrTx/>
-                        <a:buSzTx/>
-                        <a:buFontTx/>
-                        <a:buNone/>
-                        <a:tabLst/>
-                        <a:defRPr/>
-                      </a:pPr>
-                      <a:r>
-                        <a:rPr lang="ru-RU" sz="2000" dirty="0"/>
-                        <a:t>Пропуски в некоторых рядах или во всех</a:t>
-                      </a:r>
-                    </a:p>
-                  </a:txBody>
-                  <a:tcPr/>
-                </a:tc>
-                <a:tc>
-                  <a:txBody>
-                    <a:bodyPr/>
-                    <a:lstStyle/>
-                    <a:p>
-                      <a:pPr marL="285750" indent="-285750">
-                        <a:spcBef>
-                          <a:spcPts val="200"/>
-                        </a:spcBef>
-                        <a:buFont typeface="Arial" panose="020B0604020202020204" pitchFamily="34" charset="0"/>
-                        <a:buChar char="•"/>
-                      </a:pPr>
-                      <a:r>
-                        <a:rPr lang="ru-RU" sz="2000" dirty="0"/>
-                        <a:t>Интерполяция (линейная, сплайн и </a:t>
-                      </a:r>
-                      <a:r>
-                        <a:rPr lang="ru-RU" sz="2000" dirty="0" err="1"/>
-                        <a:t>тд</a:t>
-                      </a:r>
-                      <a:r>
-                        <a:rPr lang="ru-RU" sz="2000" dirty="0"/>
-                        <a:t>), </a:t>
-                      </a:r>
-                    </a:p>
-                    <a:p>
-                      <a:pPr marL="285750" indent="-285750">
-                        <a:spcBef>
-                          <a:spcPts val="200"/>
-                        </a:spcBef>
-                        <a:buFont typeface="Arial" panose="020B0604020202020204" pitchFamily="34" charset="0"/>
-                        <a:buChar char="•"/>
-                      </a:pPr>
-                      <a:r>
-                        <a:rPr lang="ru-RU" sz="2000" dirty="0"/>
-                        <a:t>скользящее среднее,</a:t>
-                      </a:r>
-                    </a:p>
-                    <a:p>
-                      <a:pPr marL="285750" indent="-285750">
-                        <a:spcBef>
-                          <a:spcPts val="200"/>
-                        </a:spcBef>
-                        <a:buFont typeface="Arial" panose="020B0604020202020204" pitchFamily="34" charset="0"/>
-                        <a:buChar char="•"/>
-                      </a:pPr>
-                      <a:r>
-                        <a:rPr lang="ru-RU" sz="2000" dirty="0"/>
-                        <a:t>Заполнение через ML</a:t>
-                      </a:r>
-                      <a:r>
-                        <a:rPr lang="en-US" sz="2000" dirty="0"/>
-                        <a:t>-</a:t>
-                      </a:r>
-                      <a:r>
-                        <a:rPr lang="ru-RU" sz="2000" dirty="0"/>
-                        <a:t>регрессию</a:t>
-                      </a:r>
-                    </a:p>
-                  </a:txBody>
-                  <a:tcPr/>
-                </a:tc>
+              </p:cNvPr>
+              <p:cNvGraphicFramePr>
+                <a:graphicFrameLocks noGrp="1"/>
+              </p:cNvGraphicFramePr>
+              <p:nvPr>
+                <p:ph idx="1"/>
+                <p:extLst>
+                  <p:ext uri="{D42A27DB-BD31-4B8C-83A1-F6EECF244321}">
+                    <p14:modId xmlns:p14="http://schemas.microsoft.com/office/powerpoint/2010/main" val="2793174000"/>
+                  </p:ext>
+                </p:extLst>
+              </p:nvPr>
+            </p:nvGraphicFramePr>
+            <p:xfrm>
+              <a:off x="233818" y="791584"/>
+              <a:ext cx="11724363" cy="5877560"/>
+            </p:xfrm>
+            <a:graphic>
+              <a:graphicData uri="http://schemas.openxmlformats.org/drawingml/2006/table">
+                <a:tbl>
+                  <a:tblPr firstRow="1" bandRow="1">
+                    <a:tableStyleId>{5C22544A-7EE6-4342-B048-85BDC9FD1C3A}</a:tableStyleId>
+                  </a:tblPr>
+                  <a:tblGrid>
+                    <a:gridCol w="1993450">
+                      <a:extLst>
+                        <a:ext uri="{9D8B030D-6E8A-4147-A177-3AD203B41FA5}">
+                          <a16:colId xmlns:a16="http://schemas.microsoft.com/office/drawing/2014/main" val="2003674582"/>
+                        </a:ext>
+                      </a:extLst>
+                    </a:gridCol>
+                    <a:gridCol w="3543055">
+                      <a:extLst>
+                        <a:ext uri="{9D8B030D-6E8A-4147-A177-3AD203B41FA5}">
+                          <a16:colId xmlns:a16="http://schemas.microsoft.com/office/drawing/2014/main" val="3372195085"/>
+                        </a:ext>
+                      </a:extLst>
+                    </a:gridCol>
+                    <a:gridCol w="6187858">
+                      <a:extLst>
+                        <a:ext uri="{9D8B030D-6E8A-4147-A177-3AD203B41FA5}">
+                          <a16:colId xmlns:a16="http://schemas.microsoft.com/office/drawing/2014/main" val="2406795206"/>
+                        </a:ext>
+                      </a:extLst>
+                    </a:gridCol>
+                  </a:tblGrid>
+                  <a:tr h="241170">
+                    <a:tc>
+                      <a:txBody>
+                        <a:bodyPr/>
+                        <a:lstStyle/>
+                        <a:p>
+                          <a:pPr algn="ctr"/>
+                          <a:endParaRPr lang="ru-RU" dirty="0"/>
+                        </a:p>
+                      </a:txBody>
+                      <a:tcPr/>
+                    </a:tc>
+                    <a:tc>
+                      <a:txBody>
+                        <a:bodyPr/>
+                        <a:lstStyle/>
+                        <a:p>
+                          <a:pPr algn="ctr"/>
+                          <a:r>
+                            <a:rPr lang="ru-RU" dirty="0"/>
+                            <a:t>Проблемы</a:t>
+                          </a:r>
+                        </a:p>
+                      </a:txBody>
+                      <a:tcPr/>
+                    </a:tc>
+                    <a:tc>
+                      <a:txBody>
+                        <a:bodyPr/>
+                        <a:lstStyle/>
+                        <a:p>
+                          <a:pPr algn="ctr"/>
+                          <a:r>
+                            <a:rPr lang="ru-RU" dirty="0"/>
+                            <a:t>Решения </a:t>
+                          </a:r>
+                        </a:p>
+                      </a:txBody>
+                      <a:tcPr/>
+                    </a:tc>
+                    <a:extLst>
+                      <a:ext uri="{0D108BD9-81ED-4DB2-BD59-A6C34878D82A}">
+                        <a16:rowId xmlns:a16="http://schemas.microsoft.com/office/drawing/2014/main" val="601287456"/>
+                      </a:ext>
+                    </a:extLst>
+                  </a:tr>
+                  <a:tr h="489185">
+                    <a:tc>
+                      <a:txBody>
+                        <a:bodyPr/>
+                        <a:lstStyle/>
+                        <a:p>
+                          <a:pPr algn="ctr"/>
+                          <a:r>
+                            <a:rPr lang="ru-RU" sz="2000" dirty="0"/>
+                            <a:t>Заполнение пропусков</a:t>
+                          </a:r>
+                        </a:p>
+                      </a:txBody>
+                      <a:tcPr/>
+                    </a:tc>
+                    <a:tc>
+                      <a:txBody>
+                        <a:bodyPr/>
+                        <a:lstStyle/>
+                        <a:p>
+                          <a:pPr marL="0" marR="0" lvl="0" indent="0" algn="ctr" defTabSz="914400" rtl="0" eaLnBrk="1" fontAlgn="auto" latinLnBrk="0" hangingPunct="1">
+                            <a:lnSpc>
+                              <a:spcPct val="100000"/>
+                            </a:lnSpc>
+                            <a:spcBef>
+                              <a:spcPts val="0"/>
+                            </a:spcBef>
+                            <a:spcAft>
+                              <a:spcPts val="0"/>
+                            </a:spcAft>
+                            <a:buClrTx/>
+                            <a:buSzTx/>
+                            <a:buFontTx/>
+                            <a:buNone/>
+                            <a:tabLst/>
+                            <a:defRPr/>
+                          </a:pPr>
+                          <a:r>
+                            <a:rPr lang="ru-RU" sz="2000" dirty="0"/>
+                            <a:t>Пропуски в некоторых рядах или во всех</a:t>
+                          </a:r>
+                        </a:p>
+                      </a:txBody>
+                      <a:tcPr/>
+                    </a:tc>
+                    <a:tc>
+                      <a:txBody>
+                        <a:bodyPr/>
+                        <a:lstStyle/>
+                        <a:p>
+                          <a:pPr marL="285750" indent="-285750" algn="l">
+                            <a:spcBef>
+                              <a:spcPts val="200"/>
+                            </a:spcBef>
+                            <a:buFont typeface="Arial" panose="020B0604020202020204" pitchFamily="34" charset="0"/>
+                            <a:buChar char="•"/>
+                          </a:pPr>
+                          <a:r>
+                            <a:rPr lang="ru-RU" sz="2000" dirty="0"/>
+                            <a:t>Интерполяция (линейная, сплайн и </a:t>
+                          </a:r>
+                          <a:r>
+                            <a:rPr lang="ru-RU" sz="2000" dirty="0" err="1"/>
+                            <a:t>тд</a:t>
+                          </a:r>
+                          <a:r>
+                            <a:rPr lang="ru-RU" sz="2000" dirty="0"/>
+                            <a:t>), </a:t>
+                          </a:r>
+                        </a:p>
+                        <a:p>
+                          <a:pPr marL="285750" indent="-285750" algn="l">
+                            <a:spcBef>
+                              <a:spcPts val="200"/>
+                            </a:spcBef>
+                            <a:buFont typeface="Arial" panose="020B0604020202020204" pitchFamily="34" charset="0"/>
+                            <a:buChar char="•"/>
+                          </a:pPr>
+                          <a:r>
+                            <a:rPr lang="ru-RU" sz="2000" dirty="0"/>
+                            <a:t>скользящее среднее,</a:t>
+                          </a:r>
+                        </a:p>
+                        <a:p>
+                          <a:pPr marL="285750" indent="-285750" algn="l">
+                            <a:spcBef>
+                              <a:spcPts val="200"/>
+                            </a:spcBef>
+                            <a:buFont typeface="Arial" panose="020B0604020202020204" pitchFamily="34" charset="0"/>
+                            <a:buChar char="•"/>
+                          </a:pPr>
+                          <a:r>
+                            <a:rPr lang="ru-RU" sz="2000" dirty="0"/>
+                            <a:t>Заполнение через ML</a:t>
+                          </a:r>
+                          <a:r>
+                            <a:rPr lang="en-US" sz="2000" dirty="0"/>
+                            <a:t>-</a:t>
+                          </a:r>
+                          <a:r>
+                            <a:rPr lang="ru-RU" sz="2000" dirty="0"/>
+                            <a:t>регрессию</a:t>
+                          </a:r>
+                        </a:p>
+                      </a:txBody>
+                      <a:tcPr/>
+                    </a:tc>
+                    <a:extLst>
+                      <a:ext uri="{0D108BD9-81ED-4DB2-BD59-A6C34878D82A}">
+                        <a16:rowId xmlns:a16="http://schemas.microsoft.com/office/drawing/2014/main" val="332529232"/>
+                      </a:ext>
+                    </a:extLst>
+                  </a:tr>
+                  <a:tr h="575798">
+                    <a:tc>
+                      <a:txBody>
+                        <a:bodyPr/>
+                        <a:lstStyle/>
+                        <a:p>
+                          <a:pPr algn="ctr"/>
+                          <a:r>
+                            <a:rPr lang="ru-RU" sz="2000" dirty="0"/>
+                            <a:t>Нормализация</a:t>
+                          </a:r>
+                        </a:p>
+                      </a:txBody>
+                      <a:tcPr/>
+                    </a:tc>
+                    <a:tc>
+                      <a:txBody>
+                        <a:bodyPr/>
+                        <a:lstStyle/>
+                        <a:p>
+                          <a:pPr algn="ctr"/>
+                          <a:r>
+                            <a:rPr lang="ru-RU" sz="2000" dirty="0"/>
+                            <a:t>Для ML алгоритмов все ВР в сопоставимых масштабах</a:t>
+                          </a:r>
+                        </a:p>
+                      </a:txBody>
+                      <a:tcPr/>
+                    </a:tc>
+                    <a:tc>
+                      <a:txBody>
+                        <a:bodyPr/>
+                        <a:lstStyle/>
+                        <a:p>
+                          <a:pPr marL="285750" indent="-285750" algn="l">
+                            <a:spcBef>
+                              <a:spcPts val="200"/>
+                            </a:spcBef>
+                            <a:buFont typeface="Arial" panose="020B0604020202020204" pitchFamily="34" charset="0"/>
+                            <a:buChar char="•"/>
+                          </a:pPr>
+                          <a:r>
+                            <a:rPr lang="en" sz="2000" b="0" dirty="0" err="1">
+                              <a:solidFill>
+                                <a:srgbClr val="1D1D20"/>
+                              </a:solidFill>
+                              <a:effectLst/>
+                            </a:rPr>
+                            <a:t>MinMaxScaler</a:t>
+                          </a:r>
+                          <a:r>
+                            <a:rPr lang="ru-RU" sz="2000" b="0" dirty="0">
+                              <a:solidFill>
+                                <a:srgbClr val="1D1D20"/>
+                              </a:solidFill>
+                              <a:effectLst/>
+                            </a:rPr>
+                            <a:t> </a:t>
+                          </a:r>
+                          <a:r>
+                            <a:rPr lang="en" sz="2000" b="0" i="0" kern="1200" dirty="0" err="1">
+                              <a:solidFill>
+                                <a:schemeClr val="dk1"/>
+                              </a:solidFill>
+                              <a:effectLst/>
+                              <a:latin typeface="+mn-lt"/>
+                              <a:ea typeface="+mn-ea"/>
+                              <a:cs typeface="+mn-cs"/>
+                            </a:rPr>
+                            <a:t>StandardScaler</a:t>
+                          </a:r>
+                          <a:r>
+                            <a:rPr lang="ru-RU" sz="2000" b="0" i="0" kern="1200" dirty="0">
+                              <a:solidFill>
+                                <a:schemeClr val="dk1"/>
+                              </a:solidFill>
+                              <a:effectLst/>
+                              <a:latin typeface="+mn-lt"/>
+                              <a:ea typeface="+mn-ea"/>
+                              <a:cs typeface="+mn-cs"/>
+                            </a:rPr>
+                            <a:t> и </a:t>
+                          </a:r>
+                          <a:r>
+                            <a:rPr lang="ru-RU" sz="2000" b="0" i="0" kern="1200" dirty="0" err="1">
+                              <a:solidFill>
+                                <a:schemeClr val="dk1"/>
+                              </a:solidFill>
+                              <a:effectLst/>
+                              <a:latin typeface="+mn-lt"/>
+                              <a:ea typeface="+mn-ea"/>
+                              <a:cs typeface="+mn-cs"/>
+                            </a:rPr>
+                            <a:t>тд</a:t>
+                          </a:r>
+                          <a:r>
+                            <a:rPr lang="ru-RU" sz="2000" b="0" i="0" kern="1200" dirty="0">
+                              <a:solidFill>
+                                <a:schemeClr val="dk1"/>
+                              </a:solidFill>
+                              <a:effectLst/>
+                              <a:latin typeface="+mn-lt"/>
+                              <a:ea typeface="+mn-ea"/>
+                              <a:cs typeface="+mn-cs"/>
+                            </a:rPr>
+                            <a:t> для склонных к нормальному </a:t>
+                          </a:r>
+                          <a:r>
+                            <a:rPr lang="ru-RU" sz="2000" b="0" i="0" kern="1200" dirty="0" err="1">
+                              <a:solidFill>
+                                <a:schemeClr val="dk1"/>
+                              </a:solidFill>
+                              <a:effectLst/>
+                              <a:latin typeface="+mn-lt"/>
+                              <a:ea typeface="+mn-ea"/>
+                              <a:cs typeface="+mn-cs"/>
+                            </a:rPr>
+                            <a:t>распределний</a:t>
+                          </a:r>
+                          <a:endParaRPr lang="ru-RU" sz="2000" b="0" i="0" kern="1200" dirty="0">
+                            <a:solidFill>
+                              <a:schemeClr val="dk1"/>
+                            </a:solidFill>
+                            <a:effectLst/>
+                            <a:latin typeface="+mn-lt"/>
+                            <a:ea typeface="+mn-ea"/>
+                            <a:cs typeface="+mn-cs"/>
+                          </a:endParaRPr>
+                        </a:p>
+                        <a:p>
+                          <a:pPr marL="285750" indent="-285750" algn="l">
+                            <a:spcBef>
+                              <a:spcPts val="200"/>
+                            </a:spcBef>
+                            <a:buFont typeface="Arial" panose="020B0604020202020204" pitchFamily="34" charset="0"/>
+                            <a:buChar char="•"/>
+                          </a:pPr>
+                          <a:r>
+                            <a:rPr lang="en" sz="2000" b="0" i="0" kern="1200" dirty="0" err="1">
+                              <a:solidFill>
+                                <a:schemeClr val="dk1"/>
+                              </a:solidFill>
+                              <a:effectLst/>
+                              <a:latin typeface="+mn-lt"/>
+                              <a:ea typeface="+mn-ea"/>
+                              <a:cs typeface="+mn-cs"/>
+                            </a:rPr>
+                            <a:t>RobustScaler</a:t>
+                          </a:r>
+                          <a:r>
+                            <a:rPr lang="ru-RU" sz="2000" b="0" i="0" kern="1200" dirty="0">
+                              <a:solidFill>
+                                <a:schemeClr val="dk1"/>
+                              </a:solidFill>
+                              <a:effectLst/>
+                              <a:latin typeface="+mn-lt"/>
+                              <a:ea typeface="+mn-ea"/>
+                              <a:cs typeface="+mn-cs"/>
+                            </a:rPr>
+                            <a:t> </a:t>
+                          </a:r>
+                          <a:r>
+                            <a:rPr lang="en" sz="2000" b="0" i="0" kern="1200" dirty="0" err="1">
+                              <a:solidFill>
+                                <a:schemeClr val="dk1"/>
+                              </a:solidFill>
+                              <a:effectLst/>
+                              <a:latin typeface="+mn-lt"/>
+                              <a:ea typeface="+mn-ea"/>
+                              <a:cs typeface="+mn-cs"/>
+                            </a:rPr>
+                            <a:t>QuantileTransformer</a:t>
+                          </a:r>
+                          <a:r>
+                            <a:rPr lang="ru-RU" sz="2000" b="0" i="0" kern="1200" dirty="0">
+                              <a:solidFill>
+                                <a:schemeClr val="dk1"/>
+                              </a:solidFill>
+                              <a:effectLst/>
+                              <a:latin typeface="+mn-lt"/>
+                              <a:ea typeface="+mn-ea"/>
+                              <a:cs typeface="+mn-cs"/>
+                            </a:rPr>
+                            <a:t> для распределений с выбросами и сильно не </a:t>
+                          </a:r>
+                          <a:r>
+                            <a:rPr lang="ru-RU" sz="2000" b="0" i="0" kern="1200" dirty="0" err="1">
+                              <a:solidFill>
+                                <a:schemeClr val="dk1"/>
+                              </a:solidFill>
+                              <a:effectLst/>
+                              <a:latin typeface="+mn-lt"/>
+                              <a:ea typeface="+mn-ea"/>
+                              <a:cs typeface="+mn-cs"/>
+                            </a:rPr>
+                            <a:t>стац</a:t>
+                          </a:r>
+                          <a:r>
+                            <a:rPr lang="ru-RU" sz="2000" b="0" i="0" kern="1200" dirty="0">
+                              <a:solidFill>
+                                <a:schemeClr val="dk1"/>
+                              </a:solidFill>
+                              <a:effectLst/>
+                              <a:latin typeface="+mn-lt"/>
+                              <a:ea typeface="+mn-ea"/>
+                              <a:cs typeface="+mn-cs"/>
+                            </a:rPr>
+                            <a:t>.</a:t>
+                          </a:r>
+                          <a:endParaRPr lang="ru-RU" sz="2000" dirty="0"/>
+                        </a:p>
+                      </a:txBody>
+                      <a:tcPr/>
+                    </a:tc>
+                    <a:extLst>
+                      <a:ext uri="{0D108BD9-81ED-4DB2-BD59-A6C34878D82A}">
+                        <a16:rowId xmlns:a16="http://schemas.microsoft.com/office/drawing/2014/main" val="2793548672"/>
+                      </a:ext>
+                    </a:extLst>
+                  </a:tr>
+                  <a:tr h="575798">
+                    <a:tc>
+                      <a:txBody>
+                        <a:bodyPr/>
+                        <a:lstStyle/>
+                        <a:p>
+                          <a:pPr algn="ctr"/>
+                          <a:r>
+                            <a:rPr lang="ru-RU" sz="2000" dirty="0"/>
+                            <a:t>Проверка на выбросы</a:t>
+                          </a:r>
+                        </a:p>
+                      </a:txBody>
+                      <a:tcPr/>
+                    </a:tc>
+                    <a:tc>
+                      <a:txBody>
+                        <a:bodyPr/>
+                        <a:lstStyle/>
+                        <a:p>
+                          <a:pPr algn="ctr"/>
+                          <a:r>
+                            <a:rPr lang="ru-RU" sz="2000" b="0" i="0" kern="1200" dirty="0">
+                              <a:solidFill>
+                                <a:schemeClr val="dk1"/>
+                              </a:solidFill>
+                              <a:effectLst/>
+                              <a:latin typeface="+mn-lt"/>
+                              <a:ea typeface="+mn-ea"/>
+                              <a:cs typeface="+mn-cs"/>
+                            </a:rPr>
+                            <a:t>Выбросы-  ложные корреляции</a:t>
+                          </a:r>
+                        </a:p>
+                        <a:p>
+                          <a:pPr algn="ctr"/>
+                          <a:r>
+                            <a:rPr lang="ru-RU" sz="2000" b="0" i="0" kern="1200" dirty="0">
+                              <a:solidFill>
+                                <a:schemeClr val="dk1"/>
+                              </a:solidFill>
+                              <a:effectLst/>
+                              <a:latin typeface="+mn-lt"/>
+                              <a:ea typeface="+mn-ea"/>
+                              <a:cs typeface="+mn-cs"/>
+                            </a:rPr>
+                            <a:t>Дают смещение результатов</a:t>
+                          </a:r>
+                        </a:p>
+                      </a:txBody>
+                      <a:tcPr/>
+                    </a:tc>
+                    <a:tc>
+                      <a:txBody>
+                        <a:bodyPr/>
+                        <a:lstStyle/>
+                        <a:p>
+                          <a:pPr marL="285750" indent="-285750" algn="l">
+                            <a:spcBef>
+                              <a:spcPts val="200"/>
+                            </a:spcBef>
+                            <a:buFont typeface="Arial" panose="020B0604020202020204" pitchFamily="34" charset="0"/>
+                            <a:buChar char="•"/>
+                          </a:pPr>
+                          <a:r>
+                            <a:rPr lang="en" sz="2000" b="0" i="0" kern="1200" dirty="0">
+                              <a:solidFill>
+                                <a:schemeClr val="dk1"/>
+                              </a:solidFill>
+                              <a:effectLst/>
+                              <a:latin typeface="+mn-lt"/>
+                              <a:ea typeface="+mn-ea"/>
+                              <a:cs typeface="+mn-cs"/>
+                            </a:rPr>
+                            <a:t>Z-score (&gt;3</a:t>
+                          </a:r>
+                          <a14:m>
+                            <m:oMath xmlns:m="http://schemas.openxmlformats.org/officeDocument/2006/math">
+                              <m:r>
+                                <a:rPr lang="el-GR" sz="2000" b="0" i="1" kern="1200" dirty="0" smtClean="0">
+                                  <a:solidFill>
+                                    <a:schemeClr val="dk1"/>
+                                  </a:solidFill>
+                                  <a:effectLst/>
+                                  <a:latin typeface="Cambria Math" panose="02040503050406030204" pitchFamily="18" charset="0"/>
+                                  <a:ea typeface="+mn-ea"/>
+                                  <a:cs typeface="+mn-cs"/>
+                                </a:rPr>
+                                <m:t>𝜎</m:t>
+                              </m:r>
+                            </m:oMath>
+                          </a14:m>
+                          <a:r>
+                            <a:rPr lang="en" sz="2000" b="0" i="0" kern="1200" dirty="0">
+                              <a:solidFill>
+                                <a:schemeClr val="dk1"/>
+                              </a:solidFill>
+                              <a:effectLst/>
+                              <a:latin typeface="+mn-lt"/>
+                              <a:ea typeface="+mn-ea"/>
+                              <a:cs typeface="+mn-cs"/>
+                            </a:rPr>
+                            <a:t>)</a:t>
+                          </a:r>
+                          <a:r>
+                            <a:rPr lang="ru-RU" sz="2000" b="0" i="0" kern="1200" dirty="0">
+                              <a:solidFill>
+                                <a:schemeClr val="dk1"/>
+                              </a:solidFill>
+                              <a:effectLst/>
+                              <a:latin typeface="+mn-lt"/>
+                              <a:ea typeface="+mn-ea"/>
+                              <a:cs typeface="+mn-cs"/>
+                            </a:rPr>
+                            <a:t>,  </a:t>
+                          </a:r>
+                          <a:r>
+                            <a:rPr lang="en" sz="2000" b="0" i="0" kern="1200" dirty="0">
+                              <a:solidFill>
+                                <a:schemeClr val="dk1"/>
+                              </a:solidFill>
+                              <a:effectLst/>
+                              <a:latin typeface="+mn-lt"/>
+                              <a:ea typeface="+mn-ea"/>
+                              <a:cs typeface="+mn-cs"/>
+                            </a:rPr>
+                            <a:t>IQR (1.5 × IQR)</a:t>
+                          </a:r>
+                        </a:p>
+                        <a:p>
+                          <a:pPr marL="285750" indent="-285750" algn="l">
+                            <a:spcBef>
+                              <a:spcPts val="200"/>
+                            </a:spcBef>
+                            <a:buFont typeface="Arial" panose="020B0604020202020204" pitchFamily="34" charset="0"/>
+                            <a:buChar char="•"/>
+                          </a:pPr>
+                          <a:r>
+                            <a:rPr lang="ru-RU" sz="2000" b="0" i="0" kern="1200" dirty="0">
+                              <a:solidFill>
+                                <a:schemeClr val="dk1"/>
+                              </a:solidFill>
+                              <a:effectLst/>
+                              <a:latin typeface="+mn-lt"/>
+                              <a:ea typeface="+mn-ea"/>
+                              <a:cs typeface="+mn-cs"/>
+                            </a:rPr>
+                            <a:t>Из</a:t>
+                          </a:r>
+                          <a:r>
+                            <a:rPr lang="en" sz="2000" b="0" i="0" kern="1200" dirty="0">
+                              <a:solidFill>
+                                <a:schemeClr val="dk1"/>
+                              </a:solidFill>
+                              <a:effectLst/>
+                              <a:latin typeface="+mn-lt"/>
+                              <a:ea typeface="+mn-ea"/>
+                              <a:cs typeface="+mn-cs"/>
+                            </a:rPr>
+                            <a:t>olation Forest, One-Class SVM</a:t>
+                          </a:r>
+                        </a:p>
+                        <a:p>
+                          <a:pPr marL="285750" indent="-285750" algn="l">
+                            <a:spcBef>
+                              <a:spcPts val="200"/>
+                            </a:spcBef>
+                            <a:buFont typeface="Arial" panose="020B0604020202020204" pitchFamily="34" charset="0"/>
+                            <a:buChar char="•"/>
+                          </a:pPr>
+                          <a:r>
+                            <a:rPr lang="en" sz="2000" b="0" i="0" kern="1200" dirty="0">
+                              <a:solidFill>
+                                <a:schemeClr val="dk1"/>
+                              </a:solidFill>
+                              <a:effectLst/>
+                              <a:latin typeface="+mn-lt"/>
+                              <a:ea typeface="+mn-ea"/>
+                              <a:cs typeface="+mn-cs"/>
+                            </a:rPr>
+                            <a:t>STL-</a:t>
+                          </a:r>
+                          <a:r>
+                            <a:rPr lang="ru-RU" sz="2000" b="0" i="0" kern="1200" dirty="0">
+                              <a:solidFill>
+                                <a:schemeClr val="dk1"/>
+                              </a:solidFill>
+                              <a:effectLst/>
+                              <a:latin typeface="+mn-lt"/>
+                              <a:ea typeface="+mn-ea"/>
+                              <a:cs typeface="+mn-cs"/>
+                            </a:rPr>
+                            <a:t>остатки (остатки &gt; 3</a:t>
+                          </a:r>
+                          <a14:m>
+                            <m:oMath xmlns:m="http://schemas.openxmlformats.org/officeDocument/2006/math">
+                              <m:r>
+                                <a:rPr lang="el-GR" sz="2000" b="0" i="1" kern="1200" dirty="0" smtClean="0">
+                                  <a:solidFill>
+                                    <a:schemeClr val="dk1"/>
+                                  </a:solidFill>
+                                  <a:effectLst/>
+                                  <a:latin typeface="Cambria Math" panose="02040503050406030204" pitchFamily="18" charset="0"/>
+                                  <a:ea typeface="+mn-ea"/>
+                                  <a:cs typeface="+mn-cs"/>
+                                </a:rPr>
+                                <m:t>𝜎</m:t>
+                              </m:r>
+                            </m:oMath>
+                          </a14:m>
+                          <a:r>
+                            <a:rPr lang="el-GR" sz="2000" b="0" i="0" kern="1200" dirty="0">
+                              <a:solidFill>
+                                <a:schemeClr val="dk1"/>
+                              </a:solidFill>
+                              <a:effectLst/>
+                              <a:latin typeface="+mn-lt"/>
+                              <a:ea typeface="+mn-ea"/>
+                              <a:cs typeface="+mn-cs"/>
+                            </a:rPr>
+                            <a:t>)</a:t>
+                          </a:r>
+                        </a:p>
+                      </a:txBody>
+                      <a:tcPr/>
+                    </a:tc>
+                    <a:extLst>
+                      <a:ext uri="{0D108BD9-81ED-4DB2-BD59-A6C34878D82A}">
+                        <a16:rowId xmlns:a16="http://schemas.microsoft.com/office/drawing/2014/main" val="783984968"/>
+                      </a:ext>
+                    </a:extLst>
+                  </a:tr>
+                  <a:tr h="575798">
+                    <a:tc>
+                      <a:txBody>
+                        <a:bodyPr/>
+                        <a:lstStyle/>
+                        <a:p>
+                          <a:pPr algn="ctr"/>
+                          <a:r>
+                            <a:rPr lang="ru-RU" sz="2000" dirty="0" err="1"/>
+                            <a:t>Кроссвалидация</a:t>
+                          </a:r>
+                          <a:endParaRPr lang="ru-RU" sz="2000" dirty="0"/>
+                        </a:p>
+                      </a:txBody>
+                      <a:tcPr/>
+                    </a:tc>
+                    <a:tc>
+                      <a:txBody>
+                        <a:bodyPr/>
+                        <a:lstStyle/>
+                        <a:p>
+                          <a:pPr algn="ctr"/>
+                          <a:r>
+                            <a:rPr lang="ru-RU" sz="2000" b="0" i="0" kern="1200" dirty="0">
+                              <a:solidFill>
+                                <a:schemeClr val="dk1"/>
+                              </a:solidFill>
+                              <a:effectLst/>
+                              <a:latin typeface="+mn-lt"/>
+                              <a:ea typeface="+mn-ea"/>
+                              <a:cs typeface="+mn-cs"/>
+                            </a:rPr>
+                            <a:t>Только последовательно!</a:t>
+                          </a:r>
+                        </a:p>
+                        <a:p>
+                          <a:pPr algn="ctr"/>
+                          <a:r>
+                            <a:rPr lang="ru-RU" sz="2000" b="0" i="0" kern="1200" dirty="0">
+                              <a:solidFill>
+                                <a:schemeClr val="dk1"/>
+                              </a:solidFill>
+                              <a:effectLst/>
+                              <a:latin typeface="+mn-lt"/>
+                              <a:ea typeface="+mn-ea"/>
+                              <a:cs typeface="+mn-cs"/>
+                            </a:rPr>
+                            <a:t>Возможность утечки данных</a:t>
+                          </a:r>
+                        </a:p>
+                      </a:txBody>
+                      <a:tcPr/>
+                    </a:tc>
+                    <a:tc>
+                      <a:txBody>
+                        <a:bodyPr/>
+                        <a:lstStyle/>
+                        <a:p>
+                          <a:pPr marL="285750" indent="-285750" algn="l">
+                            <a:spcBef>
+                              <a:spcPts val="200"/>
+                            </a:spcBef>
+                            <a:buFont typeface="Arial" panose="020B0604020202020204" pitchFamily="34" charset="0"/>
+                            <a:buChar char="•"/>
+                          </a:pPr>
+                          <a:r>
+                            <a:rPr lang="ru-RU" sz="2000" b="0" i="0" kern="1200" dirty="0">
+                              <a:solidFill>
+                                <a:schemeClr val="dk1"/>
+                              </a:solidFill>
+                              <a:effectLst/>
+                              <a:latin typeface="+mn-lt"/>
+                              <a:ea typeface="+mn-ea"/>
+                              <a:cs typeface="+mn-cs"/>
+                            </a:rPr>
+                            <a:t>Проверяйте на утечку, </a:t>
+                          </a:r>
+                        </a:p>
+                        <a:p>
+                          <a:pPr marL="285750" indent="-285750" algn="l">
+                            <a:spcBef>
+                              <a:spcPts val="200"/>
+                            </a:spcBef>
+                            <a:buFont typeface="Arial" panose="020B0604020202020204" pitchFamily="34" charset="0"/>
+                            <a:buChar char="•"/>
+                          </a:pPr>
+                          <a:r>
+                            <a:rPr lang="ru-RU" sz="2000" b="0" i="0" kern="1200" dirty="0">
+                              <a:solidFill>
+                                <a:schemeClr val="dk1"/>
+                              </a:solidFill>
+                              <a:effectLst/>
+                              <a:latin typeface="+mn-lt"/>
+                              <a:ea typeface="+mn-ea"/>
+                              <a:cs typeface="+mn-cs"/>
+                            </a:rPr>
+                            <a:t>Лучше сначала делить данные потом преобразовывать признаки</a:t>
+                          </a:r>
+                          <a:endParaRPr lang="el-GR" sz="2000" b="0" i="0" kern="1200" dirty="0">
+                            <a:solidFill>
+                              <a:schemeClr val="dk1"/>
+                            </a:solidFill>
+                            <a:effectLst/>
+                            <a:latin typeface="+mn-lt"/>
+                            <a:ea typeface="+mn-ea"/>
+                            <a:cs typeface="+mn-cs"/>
+                          </a:endParaRPr>
+                        </a:p>
+                      </a:txBody>
+                      <a:tcPr/>
+                    </a:tc>
+                    <a:extLst>
+                      <a:ext uri="{0D108BD9-81ED-4DB2-BD59-A6C34878D82A}">
+                        <a16:rowId xmlns:a16="http://schemas.microsoft.com/office/drawing/2014/main" val="87516275"/>
+                      </a:ext>
+                    </a:extLst>
+                  </a:tr>
+                  <a:tr h="575798">
+                    <a:tc>
+                      <a:txBody>
+                        <a:bodyPr/>
+                        <a:lstStyle/>
+                        <a:p>
+                          <a:pPr algn="ctr"/>
+                          <a:r>
+                            <a:rPr lang="ru-RU" sz="2000" dirty="0"/>
+                            <a:t>Экзогенные факторы</a:t>
+                          </a:r>
+                        </a:p>
+                      </a:txBody>
+                      <a:tcPr/>
+                    </a:tc>
+                    <a:tc>
+                      <a:txBody>
+                        <a:bodyPr/>
+                        <a:lstStyle/>
+                        <a:p>
+                          <a:pPr algn="ctr"/>
+                          <a:r>
+                            <a:rPr lang="ru-RU" sz="2000" b="0" i="0" kern="1200" dirty="0">
+                              <a:solidFill>
+                                <a:schemeClr val="dk1"/>
+                              </a:solidFill>
+                              <a:effectLst/>
+                              <a:latin typeface="+mn-lt"/>
+                              <a:ea typeface="+mn-ea"/>
+                              <a:cs typeface="+mn-cs"/>
+                            </a:rPr>
+                            <a:t>Действительно экзогенные?</a:t>
+                          </a:r>
+                        </a:p>
+                        <a:p>
+                          <a:pPr algn="ctr"/>
+                          <a:r>
+                            <a:rPr lang="ru-RU" sz="2000" b="0" i="0" kern="1200" dirty="0">
+                              <a:solidFill>
+                                <a:schemeClr val="dk1"/>
+                              </a:solidFill>
+                              <a:effectLst/>
+                              <a:latin typeface="+mn-lt"/>
+                              <a:ea typeface="+mn-ea"/>
+                              <a:cs typeface="+mn-cs"/>
+                            </a:rPr>
+                            <a:t>Утечка факторов</a:t>
+                          </a:r>
+                        </a:p>
+                      </a:txBody>
+                      <a:tcPr/>
+                    </a:tc>
+                    <a:tc>
+                      <a:txBody>
+                        <a:bodyPr/>
+                        <a:lstStyle/>
+                        <a:p>
+                          <a:pPr marL="285750" indent="-285750" algn="l">
+                            <a:spcBef>
+                              <a:spcPts val="200"/>
+                            </a:spcBef>
+                            <a:buFont typeface="Arial" panose="020B0604020202020204" pitchFamily="34" charset="0"/>
+                            <a:buChar char="•"/>
+                          </a:pPr>
+                          <a:r>
+                            <a:rPr lang="ru-RU" sz="2000" b="0" i="0" kern="1200" dirty="0">
+                              <a:solidFill>
+                                <a:schemeClr val="dk1"/>
+                              </a:solidFill>
+                              <a:effectLst/>
+                              <a:latin typeface="+mn-lt"/>
+                              <a:ea typeface="+mn-ea"/>
+                              <a:cs typeface="+mn-cs"/>
+                            </a:rPr>
+                            <a:t>Проверяйте необходимость факторов</a:t>
+                          </a:r>
+                        </a:p>
+                        <a:p>
+                          <a:pPr marL="285750" indent="-285750" algn="l">
+                            <a:spcBef>
+                              <a:spcPts val="200"/>
+                            </a:spcBef>
+                            <a:buFont typeface="Arial" panose="020B0604020202020204" pitchFamily="34" charset="0"/>
+                            <a:buChar char="•"/>
+                          </a:pPr>
+                          <a:r>
+                            <a:rPr lang="ru-RU" sz="2000" b="0" i="0" kern="1200" dirty="0">
+                              <a:solidFill>
+                                <a:schemeClr val="dk1"/>
+                              </a:solidFill>
+                              <a:effectLst/>
+                              <a:latin typeface="+mn-lt"/>
+                              <a:ea typeface="+mn-ea"/>
+                              <a:cs typeface="+mn-cs"/>
+                            </a:rPr>
+                            <a:t>Проверяйте на утечки и наличие значений в рабочем режиме</a:t>
+                          </a:r>
+                          <a:endParaRPr lang="el-GR" sz="2000" b="0" i="0" kern="1200" dirty="0">
+                            <a:solidFill>
+                              <a:schemeClr val="dk1"/>
+                            </a:solidFill>
+                            <a:effectLst/>
+                            <a:latin typeface="+mn-lt"/>
+                            <a:ea typeface="+mn-ea"/>
+                            <a:cs typeface="+mn-cs"/>
+                          </a:endParaRPr>
+                        </a:p>
+                      </a:txBody>
+                      <a:tcPr/>
+                    </a:tc>
+                    <a:extLst>
+                      <a:ext uri="{0D108BD9-81ED-4DB2-BD59-A6C34878D82A}">
+                        <a16:rowId xmlns:a16="http://schemas.microsoft.com/office/drawing/2014/main" val="2886357840"/>
+                      </a:ext>
+                    </a:extLst>
+                  </a:tr>
+                </a:tbl>
+              </a:graphicData>
+            </a:graphic>
+          </p:graphicFrame>
+        </mc:Choice>
+        <mc:Fallback>
+          <p:graphicFrame>
+            <p:nvGraphicFramePr>
+              <p:cNvPr id="4" name="Объект 3">
                 <a:extLst>
-                  <a:ext uri="{0D108BD9-81ED-4DB2-BD59-A6C34878D82A}">
-                    <a16:rowId xmlns:a16="http://schemas.microsoft.com/office/drawing/2014/main" val="332529232"/>
+                  <a:ext uri="{FF2B5EF4-FFF2-40B4-BE49-F238E27FC236}">
+                    <a16:creationId xmlns:a16="http://schemas.microsoft.com/office/drawing/2014/main" id="{4C6D77A8-018D-4F69-E0AB-665CC72D36BE}"/>
                   </a:ext>
                 </a:extLst>
-              </a:tr>
-              <a:tr h="575798">
-                <a:tc>
-                  <a:txBody>
-                    <a:bodyPr/>
-                    <a:lstStyle/>
-                    <a:p>
-                      <a:r>
-                        <a:rPr lang="ru-RU" sz="2000" dirty="0"/>
-                        <a:t>Нормализация</a:t>
-                      </a:r>
-                    </a:p>
-                  </a:txBody>
-                  <a:tcPr/>
-                </a:tc>
-                <a:tc>
-                  <a:txBody>
-                    <a:bodyPr/>
-                    <a:lstStyle/>
-                    <a:p>
-                      <a:r>
-                        <a:rPr lang="ru-RU" sz="2000" dirty="0"/>
-                        <a:t>Для ML алгоритмов все ВР в сопоставимых масштабах</a:t>
-                      </a:r>
-                    </a:p>
-                  </a:txBody>
-                  <a:tcPr/>
-                </a:tc>
-                <a:tc>
-                  <a:txBody>
-                    <a:bodyPr/>
-                    <a:lstStyle/>
-                    <a:p>
-                      <a:pPr marL="285750" indent="-285750">
-                        <a:spcBef>
-                          <a:spcPts val="200"/>
-                        </a:spcBef>
-                        <a:buFont typeface="Arial" panose="020B0604020202020204" pitchFamily="34" charset="0"/>
-                        <a:buChar char="•"/>
-                      </a:pPr>
-                      <a:r>
-                        <a:rPr lang="en" sz="2000" b="0" dirty="0" err="1">
-                          <a:solidFill>
-                            <a:srgbClr val="1D1D20"/>
-                          </a:solidFill>
-                          <a:effectLst/>
-                        </a:rPr>
-                        <a:t>MinMaxScaler</a:t>
-                      </a:r>
-                      <a:r>
-                        <a:rPr lang="ru-RU" sz="2000" b="0" dirty="0">
-                          <a:solidFill>
-                            <a:srgbClr val="1D1D20"/>
-                          </a:solidFill>
-                          <a:effectLst/>
-                        </a:rPr>
-                        <a:t> </a:t>
-                      </a:r>
-                      <a:r>
-                        <a:rPr lang="en" sz="2000" b="0" i="0" kern="1200" dirty="0" err="1">
-                          <a:solidFill>
-                            <a:schemeClr val="dk1"/>
-                          </a:solidFill>
-                          <a:effectLst/>
-                          <a:latin typeface="+mn-lt"/>
-                          <a:ea typeface="+mn-ea"/>
-                          <a:cs typeface="+mn-cs"/>
-                        </a:rPr>
-                        <a:t>StandardScaler</a:t>
-                      </a:r>
-                      <a:r>
-                        <a:rPr lang="ru-RU" sz="2000" b="0" i="0" kern="1200" dirty="0">
-                          <a:solidFill>
-                            <a:schemeClr val="dk1"/>
-                          </a:solidFill>
-                          <a:effectLst/>
-                          <a:latin typeface="+mn-lt"/>
-                          <a:ea typeface="+mn-ea"/>
-                          <a:cs typeface="+mn-cs"/>
-                        </a:rPr>
-                        <a:t> и </a:t>
-                      </a:r>
-                      <a:r>
-                        <a:rPr lang="ru-RU" sz="2000" b="0" i="0" kern="1200" dirty="0" err="1">
-                          <a:solidFill>
-                            <a:schemeClr val="dk1"/>
-                          </a:solidFill>
-                          <a:effectLst/>
-                          <a:latin typeface="+mn-lt"/>
-                          <a:ea typeface="+mn-ea"/>
-                          <a:cs typeface="+mn-cs"/>
-                        </a:rPr>
-                        <a:t>тд</a:t>
-                      </a:r>
-                      <a:r>
-                        <a:rPr lang="ru-RU" sz="2000" b="0" i="0" kern="1200" dirty="0">
-                          <a:solidFill>
-                            <a:schemeClr val="dk1"/>
-                          </a:solidFill>
-                          <a:effectLst/>
-                          <a:latin typeface="+mn-lt"/>
-                          <a:ea typeface="+mn-ea"/>
-                          <a:cs typeface="+mn-cs"/>
-                        </a:rPr>
-                        <a:t> для склонных к нормальному </a:t>
-                      </a:r>
-                      <a:r>
-                        <a:rPr lang="ru-RU" sz="2000" b="0" i="0" kern="1200" dirty="0" err="1">
-                          <a:solidFill>
-                            <a:schemeClr val="dk1"/>
-                          </a:solidFill>
-                          <a:effectLst/>
-                          <a:latin typeface="+mn-lt"/>
-                          <a:ea typeface="+mn-ea"/>
-                          <a:cs typeface="+mn-cs"/>
-                        </a:rPr>
-                        <a:t>распределний</a:t>
-                      </a:r>
-                      <a:endParaRPr lang="ru-RU" sz="2000" b="0" i="0" kern="1200" dirty="0">
-                        <a:solidFill>
-                          <a:schemeClr val="dk1"/>
-                        </a:solidFill>
-                        <a:effectLst/>
-                        <a:latin typeface="+mn-lt"/>
-                        <a:ea typeface="+mn-ea"/>
-                        <a:cs typeface="+mn-cs"/>
-                      </a:endParaRPr>
-                    </a:p>
-                    <a:p>
-                      <a:pPr marL="285750" indent="-285750">
-                        <a:spcBef>
-                          <a:spcPts val="200"/>
-                        </a:spcBef>
-                        <a:buFont typeface="Arial" panose="020B0604020202020204" pitchFamily="34" charset="0"/>
-                        <a:buChar char="•"/>
-                      </a:pPr>
-                      <a:r>
-                        <a:rPr lang="en" sz="2000" b="0" i="0" kern="1200" dirty="0" err="1">
-                          <a:solidFill>
-                            <a:schemeClr val="dk1"/>
-                          </a:solidFill>
-                          <a:effectLst/>
-                          <a:latin typeface="+mn-lt"/>
-                          <a:ea typeface="+mn-ea"/>
-                          <a:cs typeface="+mn-cs"/>
-                        </a:rPr>
-                        <a:t>RobustScaler</a:t>
-                      </a:r>
-                      <a:r>
-                        <a:rPr lang="ru-RU" sz="2000" b="0" i="0" kern="1200" dirty="0">
-                          <a:solidFill>
-                            <a:schemeClr val="dk1"/>
-                          </a:solidFill>
-                          <a:effectLst/>
-                          <a:latin typeface="+mn-lt"/>
-                          <a:ea typeface="+mn-ea"/>
-                          <a:cs typeface="+mn-cs"/>
-                        </a:rPr>
-                        <a:t> </a:t>
-                      </a:r>
-                      <a:r>
-                        <a:rPr lang="en" sz="2000" b="0" i="0" kern="1200" dirty="0" err="1">
-                          <a:solidFill>
-                            <a:schemeClr val="dk1"/>
-                          </a:solidFill>
-                          <a:effectLst/>
-                          <a:latin typeface="+mn-lt"/>
-                          <a:ea typeface="+mn-ea"/>
-                          <a:cs typeface="+mn-cs"/>
-                        </a:rPr>
-                        <a:t>QuantileTransformer</a:t>
-                      </a:r>
-                      <a:r>
-                        <a:rPr lang="ru-RU" sz="2000" b="0" i="0" kern="1200" dirty="0">
-                          <a:solidFill>
-                            <a:schemeClr val="dk1"/>
-                          </a:solidFill>
-                          <a:effectLst/>
-                          <a:latin typeface="+mn-lt"/>
-                          <a:ea typeface="+mn-ea"/>
-                          <a:cs typeface="+mn-cs"/>
-                        </a:rPr>
-                        <a:t> для распределений с выбросами и сильно не </a:t>
-                      </a:r>
-                      <a:r>
-                        <a:rPr lang="ru-RU" sz="2000" b="0" i="0" kern="1200" dirty="0" err="1">
-                          <a:solidFill>
-                            <a:schemeClr val="dk1"/>
-                          </a:solidFill>
-                          <a:effectLst/>
-                          <a:latin typeface="+mn-lt"/>
-                          <a:ea typeface="+mn-ea"/>
-                          <a:cs typeface="+mn-cs"/>
-                        </a:rPr>
-                        <a:t>стац</a:t>
-                      </a:r>
-                      <a:r>
-                        <a:rPr lang="ru-RU" sz="2000" b="0" i="0" kern="1200" dirty="0">
-                          <a:solidFill>
-                            <a:schemeClr val="dk1"/>
-                          </a:solidFill>
-                          <a:effectLst/>
-                          <a:latin typeface="+mn-lt"/>
-                          <a:ea typeface="+mn-ea"/>
-                          <a:cs typeface="+mn-cs"/>
-                        </a:rPr>
-                        <a:t>.</a:t>
-                      </a:r>
-                      <a:endParaRPr lang="ru-RU" sz="2000" dirty="0"/>
-                    </a:p>
-                  </a:txBody>
-                  <a:tcPr/>
-                </a:tc>
-                <a:extLst>
-                  <a:ext uri="{0D108BD9-81ED-4DB2-BD59-A6C34878D82A}">
-                    <a16:rowId xmlns:a16="http://schemas.microsoft.com/office/drawing/2014/main" val="2793548672"/>
-                  </a:ext>
-                </a:extLst>
-              </a:tr>
-              <a:tr h="575798">
-                <a:tc>
-                  <a:txBody>
-                    <a:bodyPr/>
-                    <a:lstStyle/>
-                    <a:p>
-                      <a:r>
-                        <a:rPr lang="ru-RU" sz="2000" dirty="0"/>
-                        <a:t>Проверка на выбросы</a:t>
-                      </a:r>
-                    </a:p>
-                  </a:txBody>
-                  <a:tcPr/>
-                </a:tc>
-                <a:tc>
-                  <a:txBody>
-                    <a:bodyPr/>
-                    <a:lstStyle/>
-                    <a:p>
-                      <a:r>
-                        <a:rPr lang="ru-RU" sz="2000" b="0" i="0" kern="1200" dirty="0">
-                          <a:solidFill>
-                            <a:schemeClr val="dk1"/>
-                          </a:solidFill>
-                          <a:effectLst/>
-                          <a:latin typeface="+mn-lt"/>
-                          <a:ea typeface="+mn-ea"/>
-                          <a:cs typeface="+mn-cs"/>
-                        </a:rPr>
-                        <a:t>Выбросы-  ложные корреляции</a:t>
-                      </a:r>
-                    </a:p>
-                    <a:p>
-                      <a:r>
-                        <a:rPr lang="ru-RU" sz="2000" b="0" i="0" kern="1200" dirty="0">
-                          <a:solidFill>
-                            <a:schemeClr val="dk1"/>
-                          </a:solidFill>
-                          <a:effectLst/>
-                          <a:latin typeface="+mn-lt"/>
-                          <a:ea typeface="+mn-ea"/>
-                          <a:cs typeface="+mn-cs"/>
-                        </a:rPr>
-                        <a:t>Дают смещение результатов</a:t>
-                      </a:r>
-                    </a:p>
-                  </a:txBody>
-                  <a:tcPr/>
-                </a:tc>
-                <a:tc>
-                  <a:txBody>
-                    <a:bodyPr/>
-                    <a:lstStyle/>
-                    <a:p>
-                      <a:pPr marL="285750" indent="-285750">
-                        <a:spcBef>
-                          <a:spcPts val="200"/>
-                        </a:spcBef>
-                        <a:buFont typeface="Arial" panose="020B0604020202020204" pitchFamily="34" charset="0"/>
-                        <a:buChar char="•"/>
-                      </a:pPr>
-                      <a:r>
-                        <a:rPr lang="en" sz="2000" b="0" i="0" kern="1200" dirty="0">
-                          <a:solidFill>
-                            <a:schemeClr val="dk1"/>
-                          </a:solidFill>
-                          <a:effectLst/>
-                          <a:latin typeface="+mn-lt"/>
-                          <a:ea typeface="+mn-ea"/>
-                          <a:cs typeface="+mn-cs"/>
-                        </a:rPr>
-                        <a:t>Z-score (&gt;3</a:t>
-                      </a:r>
-                      <a:r>
-                        <a:rPr lang="el-GR" sz="2000" b="0" i="0" kern="1200" dirty="0">
-                          <a:solidFill>
-                            <a:schemeClr val="dk1"/>
-                          </a:solidFill>
-                          <a:effectLst/>
-                          <a:latin typeface="+mn-lt"/>
-                          <a:ea typeface="+mn-ea"/>
-                          <a:cs typeface="+mn-cs"/>
-                        </a:rPr>
-                        <a:t>σ</a:t>
-                      </a:r>
-                      <a:r>
-                        <a:rPr lang="en" sz="2000" b="0" i="0" kern="1200" dirty="0">
-                          <a:solidFill>
-                            <a:schemeClr val="dk1"/>
-                          </a:solidFill>
-                          <a:effectLst/>
-                          <a:latin typeface="+mn-lt"/>
-                          <a:ea typeface="+mn-ea"/>
-                          <a:cs typeface="+mn-cs"/>
-                        </a:rPr>
-                        <a:t>)</a:t>
-                      </a:r>
-                      <a:r>
-                        <a:rPr lang="ru-RU" sz="2000" b="0" i="0" kern="1200" dirty="0">
-                          <a:solidFill>
-                            <a:schemeClr val="dk1"/>
-                          </a:solidFill>
-                          <a:effectLst/>
-                          <a:latin typeface="+mn-lt"/>
-                          <a:ea typeface="+mn-ea"/>
-                          <a:cs typeface="+mn-cs"/>
-                        </a:rPr>
-                        <a:t>,  </a:t>
-                      </a:r>
-                      <a:r>
-                        <a:rPr lang="en" sz="2000" b="0" i="0" kern="1200" dirty="0">
-                          <a:solidFill>
-                            <a:schemeClr val="dk1"/>
-                          </a:solidFill>
-                          <a:effectLst/>
-                          <a:latin typeface="+mn-lt"/>
-                          <a:ea typeface="+mn-ea"/>
-                          <a:cs typeface="+mn-cs"/>
-                        </a:rPr>
-                        <a:t>IQR (1.5 × IQR)</a:t>
-                      </a:r>
-                    </a:p>
-                    <a:p>
-                      <a:pPr marL="285750" indent="-285750">
-                        <a:spcBef>
-                          <a:spcPts val="200"/>
-                        </a:spcBef>
-                        <a:buFont typeface="Arial" panose="020B0604020202020204" pitchFamily="34" charset="0"/>
-                        <a:buChar char="•"/>
-                      </a:pPr>
-                      <a:r>
-                        <a:rPr lang="ru-RU" sz="2000" b="0" i="0" kern="1200" dirty="0">
-                          <a:solidFill>
-                            <a:schemeClr val="dk1"/>
-                          </a:solidFill>
-                          <a:effectLst/>
-                          <a:latin typeface="+mn-lt"/>
-                          <a:ea typeface="+mn-ea"/>
-                          <a:cs typeface="+mn-cs"/>
-                        </a:rPr>
-                        <a:t>Из</a:t>
-                      </a:r>
-                      <a:r>
-                        <a:rPr lang="en" sz="2000" b="0" i="0" kern="1200" dirty="0">
-                          <a:solidFill>
-                            <a:schemeClr val="dk1"/>
-                          </a:solidFill>
-                          <a:effectLst/>
-                          <a:latin typeface="+mn-lt"/>
-                          <a:ea typeface="+mn-ea"/>
-                          <a:cs typeface="+mn-cs"/>
-                        </a:rPr>
-                        <a:t>olation Forest, One-Class SVM</a:t>
-                      </a:r>
-                    </a:p>
-                    <a:p>
-                      <a:pPr marL="285750" indent="-285750">
-                        <a:spcBef>
-                          <a:spcPts val="200"/>
-                        </a:spcBef>
-                        <a:buFont typeface="Arial" panose="020B0604020202020204" pitchFamily="34" charset="0"/>
-                        <a:buChar char="•"/>
-                      </a:pPr>
-                      <a:r>
-                        <a:rPr lang="en" sz="2000" b="0" i="0" kern="1200" dirty="0">
-                          <a:solidFill>
-                            <a:schemeClr val="dk1"/>
-                          </a:solidFill>
-                          <a:effectLst/>
-                          <a:latin typeface="+mn-lt"/>
-                          <a:ea typeface="+mn-ea"/>
-                          <a:cs typeface="+mn-cs"/>
-                        </a:rPr>
-                        <a:t>STL-</a:t>
-                      </a:r>
-                      <a:r>
-                        <a:rPr lang="ru-RU" sz="2000" b="0" i="0" kern="1200" dirty="0">
-                          <a:solidFill>
-                            <a:schemeClr val="dk1"/>
-                          </a:solidFill>
-                          <a:effectLst/>
-                          <a:latin typeface="+mn-lt"/>
-                          <a:ea typeface="+mn-ea"/>
-                          <a:cs typeface="+mn-cs"/>
-                        </a:rPr>
-                        <a:t>остатки (остатки &gt; 3</a:t>
-                      </a:r>
-                      <a:r>
-                        <a:rPr lang="el-GR" sz="2000" b="0" i="0" kern="1200" dirty="0">
-                          <a:solidFill>
-                            <a:schemeClr val="dk1"/>
-                          </a:solidFill>
-                          <a:effectLst/>
-                          <a:latin typeface="+mn-lt"/>
-                          <a:ea typeface="+mn-ea"/>
-                          <a:cs typeface="+mn-cs"/>
-                        </a:rPr>
-                        <a:t>σ)</a:t>
-                      </a:r>
-                    </a:p>
-                  </a:txBody>
-                  <a:tcPr/>
-                </a:tc>
-                <a:extLst>
-                  <a:ext uri="{0D108BD9-81ED-4DB2-BD59-A6C34878D82A}">
-                    <a16:rowId xmlns:a16="http://schemas.microsoft.com/office/drawing/2014/main" val="783984968"/>
-                  </a:ext>
-                </a:extLst>
-              </a:tr>
-              <a:tr h="575798">
-                <a:tc>
-                  <a:txBody>
-                    <a:bodyPr/>
-                    <a:lstStyle/>
-                    <a:p>
-                      <a:r>
-                        <a:rPr lang="ru-RU" sz="2000" dirty="0" err="1"/>
-                        <a:t>Кроссвалидация</a:t>
-                      </a:r>
-                      <a:endParaRPr lang="ru-RU" sz="2000" dirty="0"/>
-                    </a:p>
-                  </a:txBody>
-                  <a:tcPr/>
-                </a:tc>
-                <a:tc>
-                  <a:txBody>
-                    <a:bodyPr/>
-                    <a:lstStyle/>
-                    <a:p>
-                      <a:r>
-                        <a:rPr lang="ru-RU" sz="2000" b="0" i="0" kern="1200" dirty="0">
-                          <a:solidFill>
-                            <a:schemeClr val="dk1"/>
-                          </a:solidFill>
-                          <a:effectLst/>
-                          <a:latin typeface="+mn-lt"/>
-                          <a:ea typeface="+mn-ea"/>
-                          <a:cs typeface="+mn-cs"/>
-                        </a:rPr>
-                        <a:t>Только последовательно!</a:t>
-                      </a:r>
-                    </a:p>
-                    <a:p>
-                      <a:r>
-                        <a:rPr lang="ru-RU" sz="2000" b="0" i="0" kern="1200" dirty="0">
-                          <a:solidFill>
-                            <a:schemeClr val="dk1"/>
-                          </a:solidFill>
-                          <a:effectLst/>
-                          <a:latin typeface="+mn-lt"/>
-                          <a:ea typeface="+mn-ea"/>
-                          <a:cs typeface="+mn-cs"/>
-                        </a:rPr>
-                        <a:t>Возможность утечки данных</a:t>
-                      </a:r>
-                    </a:p>
-                  </a:txBody>
-                  <a:tcPr/>
-                </a:tc>
-                <a:tc>
-                  <a:txBody>
-                    <a:bodyPr/>
-                    <a:lstStyle/>
-                    <a:p>
-                      <a:pPr marL="285750" indent="-285750">
-                        <a:spcBef>
-                          <a:spcPts val="200"/>
-                        </a:spcBef>
-                        <a:buFont typeface="Arial" panose="020B0604020202020204" pitchFamily="34" charset="0"/>
-                        <a:buChar char="•"/>
-                      </a:pPr>
-                      <a:r>
-                        <a:rPr lang="ru-RU" sz="2000" b="0" i="0" kern="1200" dirty="0">
-                          <a:solidFill>
-                            <a:schemeClr val="dk1"/>
-                          </a:solidFill>
-                          <a:effectLst/>
-                          <a:latin typeface="+mn-lt"/>
-                          <a:ea typeface="+mn-ea"/>
-                          <a:cs typeface="+mn-cs"/>
-                        </a:rPr>
-                        <a:t>Проверяйте на утечку, </a:t>
-                      </a:r>
-                    </a:p>
-                    <a:p>
-                      <a:pPr marL="285750" indent="-285750">
-                        <a:spcBef>
-                          <a:spcPts val="200"/>
-                        </a:spcBef>
-                        <a:buFont typeface="Arial" panose="020B0604020202020204" pitchFamily="34" charset="0"/>
-                        <a:buChar char="•"/>
-                      </a:pPr>
-                      <a:r>
-                        <a:rPr lang="ru-RU" sz="2000" b="0" i="0" kern="1200" dirty="0">
-                          <a:solidFill>
-                            <a:schemeClr val="dk1"/>
-                          </a:solidFill>
-                          <a:effectLst/>
-                          <a:latin typeface="+mn-lt"/>
-                          <a:ea typeface="+mn-ea"/>
-                          <a:cs typeface="+mn-cs"/>
-                        </a:rPr>
-                        <a:t>Лучше сначала делить данные потом преобразовывать признаки</a:t>
-                      </a:r>
-                      <a:endParaRPr lang="el-GR" sz="2000" b="0" i="0" kern="1200" dirty="0">
-                        <a:solidFill>
-                          <a:schemeClr val="dk1"/>
-                        </a:solidFill>
-                        <a:effectLst/>
-                        <a:latin typeface="+mn-lt"/>
-                        <a:ea typeface="+mn-ea"/>
-                        <a:cs typeface="+mn-cs"/>
-                      </a:endParaRPr>
-                    </a:p>
-                  </a:txBody>
-                  <a:tcPr/>
-                </a:tc>
-                <a:extLst>
-                  <a:ext uri="{0D108BD9-81ED-4DB2-BD59-A6C34878D82A}">
-                    <a16:rowId xmlns:a16="http://schemas.microsoft.com/office/drawing/2014/main" val="87516275"/>
-                  </a:ext>
-                </a:extLst>
-              </a:tr>
-              <a:tr h="575798">
-                <a:tc>
-                  <a:txBody>
-                    <a:bodyPr/>
-                    <a:lstStyle/>
-                    <a:p>
-                      <a:r>
-                        <a:rPr lang="ru-RU" sz="2000" dirty="0"/>
-                        <a:t>Экзогенные факторы</a:t>
-                      </a:r>
-                    </a:p>
-                  </a:txBody>
-                  <a:tcPr/>
-                </a:tc>
-                <a:tc>
-                  <a:txBody>
-                    <a:bodyPr/>
-                    <a:lstStyle/>
-                    <a:p>
-                      <a:r>
-                        <a:rPr lang="ru-RU" sz="2000" b="0" i="0" kern="1200" dirty="0">
-                          <a:solidFill>
-                            <a:schemeClr val="dk1"/>
-                          </a:solidFill>
-                          <a:effectLst/>
-                          <a:latin typeface="+mn-lt"/>
-                          <a:ea typeface="+mn-ea"/>
-                          <a:cs typeface="+mn-cs"/>
-                        </a:rPr>
-                        <a:t>Действительно экзогенные?</a:t>
-                      </a:r>
-                    </a:p>
-                    <a:p>
-                      <a:r>
-                        <a:rPr lang="ru-RU" sz="2000" b="0" i="0" kern="1200" dirty="0">
-                          <a:solidFill>
-                            <a:schemeClr val="dk1"/>
-                          </a:solidFill>
-                          <a:effectLst/>
-                          <a:latin typeface="+mn-lt"/>
-                          <a:ea typeface="+mn-ea"/>
-                          <a:cs typeface="+mn-cs"/>
-                        </a:rPr>
-                        <a:t>Утечка факторов</a:t>
-                      </a:r>
-                    </a:p>
-                  </a:txBody>
-                  <a:tcPr/>
-                </a:tc>
-                <a:tc>
-                  <a:txBody>
-                    <a:bodyPr/>
-                    <a:lstStyle/>
-                    <a:p>
-                      <a:pPr marL="285750" indent="-285750">
-                        <a:spcBef>
-                          <a:spcPts val="200"/>
-                        </a:spcBef>
-                        <a:buFont typeface="Arial" panose="020B0604020202020204" pitchFamily="34" charset="0"/>
-                        <a:buChar char="•"/>
-                      </a:pPr>
-                      <a:r>
-                        <a:rPr lang="ru-RU" sz="2000" b="0" i="0" kern="1200" dirty="0">
-                          <a:solidFill>
-                            <a:schemeClr val="dk1"/>
-                          </a:solidFill>
-                          <a:effectLst/>
-                          <a:latin typeface="+mn-lt"/>
-                          <a:ea typeface="+mn-ea"/>
-                          <a:cs typeface="+mn-cs"/>
-                        </a:rPr>
-                        <a:t>Проверяйте необходимость факторов</a:t>
-                      </a:r>
-                    </a:p>
-                    <a:p>
-                      <a:pPr marL="285750" indent="-285750">
-                        <a:spcBef>
-                          <a:spcPts val="200"/>
-                        </a:spcBef>
-                        <a:buFont typeface="Arial" panose="020B0604020202020204" pitchFamily="34" charset="0"/>
-                        <a:buChar char="•"/>
-                      </a:pPr>
-                      <a:r>
-                        <a:rPr lang="ru-RU" sz="2000" b="0" i="0" kern="1200" dirty="0">
-                          <a:solidFill>
-                            <a:schemeClr val="dk1"/>
-                          </a:solidFill>
-                          <a:effectLst/>
-                          <a:latin typeface="+mn-lt"/>
-                          <a:ea typeface="+mn-ea"/>
-                          <a:cs typeface="+mn-cs"/>
-                        </a:rPr>
-                        <a:t>Проверяйте на утечки и наличие значений в рабочем режиме</a:t>
-                      </a:r>
-                      <a:endParaRPr lang="el-GR" sz="2000" b="0" i="0" kern="1200" dirty="0">
-                        <a:solidFill>
-                          <a:schemeClr val="dk1"/>
-                        </a:solidFill>
-                        <a:effectLst/>
-                        <a:latin typeface="+mn-lt"/>
-                        <a:ea typeface="+mn-ea"/>
-                        <a:cs typeface="+mn-cs"/>
-                      </a:endParaRPr>
-                    </a:p>
-                  </a:txBody>
-                  <a:tcPr/>
-                </a:tc>
-                <a:extLst>
-                  <a:ext uri="{0D108BD9-81ED-4DB2-BD59-A6C34878D82A}">
-                    <a16:rowId xmlns:a16="http://schemas.microsoft.com/office/drawing/2014/main" val="2886357840"/>
-                  </a:ext>
-                </a:extLst>
-              </a:tr>
-            </a:tbl>
-          </a:graphicData>
-        </a:graphic>
-      </p:graphicFrame>
+              </p:cNvPr>
+              <p:cNvGraphicFramePr>
+                <a:graphicFrameLocks noGrp="1"/>
+              </p:cNvGraphicFramePr>
+              <p:nvPr>
+                <p:ph idx="1"/>
+                <p:extLst>
+                  <p:ext uri="{D42A27DB-BD31-4B8C-83A1-F6EECF244321}">
+                    <p14:modId xmlns:p14="http://schemas.microsoft.com/office/powerpoint/2010/main" val="2793174000"/>
+                  </p:ext>
+                </p:extLst>
+              </p:nvPr>
+            </p:nvGraphicFramePr>
+            <p:xfrm>
+              <a:off x="233818" y="791584"/>
+              <a:ext cx="11724363" cy="5877560"/>
+            </p:xfrm>
+            <a:graphic>
+              <a:graphicData uri="http://schemas.openxmlformats.org/drawingml/2006/table">
+                <a:tbl>
+                  <a:tblPr firstRow="1" bandRow="1">
+                    <a:tableStyleId>{5C22544A-7EE6-4342-B048-85BDC9FD1C3A}</a:tableStyleId>
+                  </a:tblPr>
+                  <a:tblGrid>
+                    <a:gridCol w="1993450">
+                      <a:extLst>
+                        <a:ext uri="{9D8B030D-6E8A-4147-A177-3AD203B41FA5}">
+                          <a16:colId xmlns:a16="http://schemas.microsoft.com/office/drawing/2014/main" val="2003674582"/>
+                        </a:ext>
+                      </a:extLst>
+                    </a:gridCol>
+                    <a:gridCol w="3543055">
+                      <a:extLst>
+                        <a:ext uri="{9D8B030D-6E8A-4147-A177-3AD203B41FA5}">
+                          <a16:colId xmlns:a16="http://schemas.microsoft.com/office/drawing/2014/main" val="3372195085"/>
+                        </a:ext>
+                      </a:extLst>
+                    </a:gridCol>
+                    <a:gridCol w="6187858">
+                      <a:extLst>
+                        <a:ext uri="{9D8B030D-6E8A-4147-A177-3AD203B41FA5}">
+                          <a16:colId xmlns:a16="http://schemas.microsoft.com/office/drawing/2014/main" val="2406795206"/>
+                        </a:ext>
+                      </a:extLst>
+                    </a:gridCol>
+                  </a:tblGrid>
+                  <a:tr h="365760">
+                    <a:tc>
+                      <a:txBody>
+                        <a:bodyPr/>
+                        <a:lstStyle/>
+                        <a:p>
+                          <a:pPr algn="ctr"/>
+                          <a:endParaRPr lang="ru-RU" dirty="0"/>
+                        </a:p>
+                      </a:txBody>
+                      <a:tcPr/>
+                    </a:tc>
+                    <a:tc>
+                      <a:txBody>
+                        <a:bodyPr/>
+                        <a:lstStyle/>
+                        <a:p>
+                          <a:pPr algn="ctr"/>
+                          <a:r>
+                            <a:rPr lang="ru-RU" dirty="0"/>
+                            <a:t>Проблемы</a:t>
+                          </a:r>
+                        </a:p>
+                      </a:txBody>
+                      <a:tcPr/>
+                    </a:tc>
+                    <a:tc>
+                      <a:txBody>
+                        <a:bodyPr/>
+                        <a:lstStyle/>
+                        <a:p>
+                          <a:pPr algn="ctr"/>
+                          <a:r>
+                            <a:rPr lang="ru-RU" dirty="0"/>
+                            <a:t>Решения </a:t>
+                          </a:r>
+                        </a:p>
+                      </a:txBody>
+                      <a:tcPr/>
+                    </a:tc>
+                    <a:extLst>
+                      <a:ext uri="{0D108BD9-81ED-4DB2-BD59-A6C34878D82A}">
+                        <a16:rowId xmlns:a16="http://schemas.microsoft.com/office/drawing/2014/main" val="601287456"/>
+                      </a:ext>
+                    </a:extLst>
+                  </a:tr>
+                  <a:tr h="1056640">
+                    <a:tc>
+                      <a:txBody>
+                        <a:bodyPr/>
+                        <a:lstStyle/>
+                        <a:p>
+                          <a:pPr algn="ctr"/>
+                          <a:r>
+                            <a:rPr lang="ru-RU" sz="2000" dirty="0"/>
+                            <a:t>Заполнение пропусков</a:t>
+                          </a:r>
+                        </a:p>
+                      </a:txBody>
+                      <a:tcPr/>
+                    </a:tc>
+                    <a:tc>
+                      <a:txBody>
+                        <a:bodyPr/>
+                        <a:lstStyle/>
+                        <a:p>
+                          <a:pPr marL="0" marR="0" lvl="0" indent="0" algn="ctr" defTabSz="914400" rtl="0" eaLnBrk="1" fontAlgn="auto" latinLnBrk="0" hangingPunct="1">
+                            <a:lnSpc>
+                              <a:spcPct val="100000"/>
+                            </a:lnSpc>
+                            <a:spcBef>
+                              <a:spcPts val="0"/>
+                            </a:spcBef>
+                            <a:spcAft>
+                              <a:spcPts val="0"/>
+                            </a:spcAft>
+                            <a:buClrTx/>
+                            <a:buSzTx/>
+                            <a:buFontTx/>
+                            <a:buNone/>
+                            <a:tabLst/>
+                            <a:defRPr/>
+                          </a:pPr>
+                          <a:r>
+                            <a:rPr lang="ru-RU" sz="2000" dirty="0"/>
+                            <a:t>Пропуски в некоторых рядах или во всех</a:t>
+                          </a:r>
+                        </a:p>
+                      </a:txBody>
+                      <a:tcPr/>
+                    </a:tc>
+                    <a:tc>
+                      <a:txBody>
+                        <a:bodyPr/>
+                        <a:lstStyle/>
+                        <a:p>
+                          <a:pPr marL="285750" indent="-285750" algn="l">
+                            <a:spcBef>
+                              <a:spcPts val="200"/>
+                            </a:spcBef>
+                            <a:buFont typeface="Arial" panose="020B0604020202020204" pitchFamily="34" charset="0"/>
+                            <a:buChar char="•"/>
+                          </a:pPr>
+                          <a:r>
+                            <a:rPr lang="ru-RU" sz="2000" dirty="0"/>
+                            <a:t>Интерполяция (линейная, сплайн и </a:t>
+                          </a:r>
+                          <a:r>
+                            <a:rPr lang="ru-RU" sz="2000" dirty="0" err="1"/>
+                            <a:t>тд</a:t>
+                          </a:r>
+                          <a:r>
+                            <a:rPr lang="ru-RU" sz="2000" dirty="0"/>
+                            <a:t>), </a:t>
+                          </a:r>
+                        </a:p>
+                        <a:p>
+                          <a:pPr marL="285750" indent="-285750" algn="l">
+                            <a:spcBef>
+                              <a:spcPts val="200"/>
+                            </a:spcBef>
+                            <a:buFont typeface="Arial" panose="020B0604020202020204" pitchFamily="34" charset="0"/>
+                            <a:buChar char="•"/>
+                          </a:pPr>
+                          <a:r>
+                            <a:rPr lang="ru-RU" sz="2000" dirty="0"/>
+                            <a:t>скользящее среднее,</a:t>
+                          </a:r>
+                        </a:p>
+                        <a:p>
+                          <a:pPr marL="285750" indent="-285750" algn="l">
+                            <a:spcBef>
+                              <a:spcPts val="200"/>
+                            </a:spcBef>
+                            <a:buFont typeface="Arial" panose="020B0604020202020204" pitchFamily="34" charset="0"/>
+                            <a:buChar char="•"/>
+                          </a:pPr>
+                          <a:r>
+                            <a:rPr lang="ru-RU" sz="2000" dirty="0"/>
+                            <a:t>Заполнение через ML</a:t>
+                          </a:r>
+                          <a:r>
+                            <a:rPr lang="en-US" sz="2000" dirty="0"/>
+                            <a:t>-</a:t>
+                          </a:r>
+                          <a:r>
+                            <a:rPr lang="ru-RU" sz="2000" dirty="0"/>
+                            <a:t>регрессию</a:t>
+                          </a:r>
+                        </a:p>
+                      </a:txBody>
+                      <a:tcPr/>
+                    </a:tc>
+                    <a:extLst>
+                      <a:ext uri="{0D108BD9-81ED-4DB2-BD59-A6C34878D82A}">
+                        <a16:rowId xmlns:a16="http://schemas.microsoft.com/office/drawing/2014/main" val="332529232"/>
+                      </a:ext>
+                    </a:extLst>
+                  </a:tr>
+                  <a:tr h="1336040">
+                    <a:tc>
+                      <a:txBody>
+                        <a:bodyPr/>
+                        <a:lstStyle/>
+                        <a:p>
+                          <a:pPr algn="ctr"/>
+                          <a:r>
+                            <a:rPr lang="ru-RU" sz="2000" dirty="0"/>
+                            <a:t>Нормализация</a:t>
+                          </a:r>
+                        </a:p>
+                      </a:txBody>
+                      <a:tcPr/>
+                    </a:tc>
+                    <a:tc>
+                      <a:txBody>
+                        <a:bodyPr/>
+                        <a:lstStyle/>
+                        <a:p>
+                          <a:pPr algn="ctr"/>
+                          <a:r>
+                            <a:rPr lang="ru-RU" sz="2000" dirty="0"/>
+                            <a:t>Для ML алгоритмов все ВР в сопоставимых масштабах</a:t>
+                          </a:r>
+                        </a:p>
+                      </a:txBody>
+                      <a:tcPr/>
+                    </a:tc>
+                    <a:tc>
+                      <a:txBody>
+                        <a:bodyPr/>
+                        <a:lstStyle/>
+                        <a:p>
+                          <a:pPr marL="285750" indent="-285750" algn="l">
+                            <a:spcBef>
+                              <a:spcPts val="200"/>
+                            </a:spcBef>
+                            <a:buFont typeface="Arial" panose="020B0604020202020204" pitchFamily="34" charset="0"/>
+                            <a:buChar char="•"/>
+                          </a:pPr>
+                          <a:r>
+                            <a:rPr lang="en" sz="2000" b="0" dirty="0" err="1">
+                              <a:solidFill>
+                                <a:srgbClr val="1D1D20"/>
+                              </a:solidFill>
+                              <a:effectLst/>
+                            </a:rPr>
+                            <a:t>MinMaxScaler</a:t>
+                          </a:r>
+                          <a:r>
+                            <a:rPr lang="ru-RU" sz="2000" b="0" dirty="0">
+                              <a:solidFill>
+                                <a:srgbClr val="1D1D20"/>
+                              </a:solidFill>
+                              <a:effectLst/>
+                            </a:rPr>
+                            <a:t> </a:t>
+                          </a:r>
+                          <a:r>
+                            <a:rPr lang="en" sz="2000" b="0" i="0" kern="1200" dirty="0" err="1">
+                              <a:solidFill>
+                                <a:schemeClr val="dk1"/>
+                              </a:solidFill>
+                              <a:effectLst/>
+                              <a:latin typeface="+mn-lt"/>
+                              <a:ea typeface="+mn-ea"/>
+                              <a:cs typeface="+mn-cs"/>
+                            </a:rPr>
+                            <a:t>StandardScaler</a:t>
+                          </a:r>
+                          <a:r>
+                            <a:rPr lang="ru-RU" sz="2000" b="0" i="0" kern="1200" dirty="0">
+                              <a:solidFill>
+                                <a:schemeClr val="dk1"/>
+                              </a:solidFill>
+                              <a:effectLst/>
+                              <a:latin typeface="+mn-lt"/>
+                              <a:ea typeface="+mn-ea"/>
+                              <a:cs typeface="+mn-cs"/>
+                            </a:rPr>
+                            <a:t> и </a:t>
+                          </a:r>
+                          <a:r>
+                            <a:rPr lang="ru-RU" sz="2000" b="0" i="0" kern="1200" dirty="0" err="1">
+                              <a:solidFill>
+                                <a:schemeClr val="dk1"/>
+                              </a:solidFill>
+                              <a:effectLst/>
+                              <a:latin typeface="+mn-lt"/>
+                              <a:ea typeface="+mn-ea"/>
+                              <a:cs typeface="+mn-cs"/>
+                            </a:rPr>
+                            <a:t>тд</a:t>
+                          </a:r>
+                          <a:r>
+                            <a:rPr lang="ru-RU" sz="2000" b="0" i="0" kern="1200" dirty="0">
+                              <a:solidFill>
+                                <a:schemeClr val="dk1"/>
+                              </a:solidFill>
+                              <a:effectLst/>
+                              <a:latin typeface="+mn-lt"/>
+                              <a:ea typeface="+mn-ea"/>
+                              <a:cs typeface="+mn-cs"/>
+                            </a:rPr>
+                            <a:t> для склонных к нормальному </a:t>
+                          </a:r>
+                          <a:r>
+                            <a:rPr lang="ru-RU" sz="2000" b="0" i="0" kern="1200" dirty="0" err="1">
+                              <a:solidFill>
+                                <a:schemeClr val="dk1"/>
+                              </a:solidFill>
+                              <a:effectLst/>
+                              <a:latin typeface="+mn-lt"/>
+                              <a:ea typeface="+mn-ea"/>
+                              <a:cs typeface="+mn-cs"/>
+                            </a:rPr>
+                            <a:t>распределний</a:t>
+                          </a:r>
+                          <a:endParaRPr lang="ru-RU" sz="2000" b="0" i="0" kern="1200" dirty="0">
+                            <a:solidFill>
+                              <a:schemeClr val="dk1"/>
+                            </a:solidFill>
+                            <a:effectLst/>
+                            <a:latin typeface="+mn-lt"/>
+                            <a:ea typeface="+mn-ea"/>
+                            <a:cs typeface="+mn-cs"/>
+                          </a:endParaRPr>
+                        </a:p>
+                        <a:p>
+                          <a:pPr marL="285750" indent="-285750" algn="l">
+                            <a:spcBef>
+                              <a:spcPts val="200"/>
+                            </a:spcBef>
+                            <a:buFont typeface="Arial" panose="020B0604020202020204" pitchFamily="34" charset="0"/>
+                            <a:buChar char="•"/>
+                          </a:pPr>
+                          <a:r>
+                            <a:rPr lang="en" sz="2000" b="0" i="0" kern="1200" dirty="0" err="1">
+                              <a:solidFill>
+                                <a:schemeClr val="dk1"/>
+                              </a:solidFill>
+                              <a:effectLst/>
+                              <a:latin typeface="+mn-lt"/>
+                              <a:ea typeface="+mn-ea"/>
+                              <a:cs typeface="+mn-cs"/>
+                            </a:rPr>
+                            <a:t>RobustScaler</a:t>
+                          </a:r>
+                          <a:r>
+                            <a:rPr lang="ru-RU" sz="2000" b="0" i="0" kern="1200" dirty="0">
+                              <a:solidFill>
+                                <a:schemeClr val="dk1"/>
+                              </a:solidFill>
+                              <a:effectLst/>
+                              <a:latin typeface="+mn-lt"/>
+                              <a:ea typeface="+mn-ea"/>
+                              <a:cs typeface="+mn-cs"/>
+                            </a:rPr>
+                            <a:t> </a:t>
+                          </a:r>
+                          <a:r>
+                            <a:rPr lang="en" sz="2000" b="0" i="0" kern="1200" dirty="0" err="1">
+                              <a:solidFill>
+                                <a:schemeClr val="dk1"/>
+                              </a:solidFill>
+                              <a:effectLst/>
+                              <a:latin typeface="+mn-lt"/>
+                              <a:ea typeface="+mn-ea"/>
+                              <a:cs typeface="+mn-cs"/>
+                            </a:rPr>
+                            <a:t>QuantileTransformer</a:t>
+                          </a:r>
+                          <a:r>
+                            <a:rPr lang="ru-RU" sz="2000" b="0" i="0" kern="1200" dirty="0">
+                              <a:solidFill>
+                                <a:schemeClr val="dk1"/>
+                              </a:solidFill>
+                              <a:effectLst/>
+                              <a:latin typeface="+mn-lt"/>
+                              <a:ea typeface="+mn-ea"/>
+                              <a:cs typeface="+mn-cs"/>
+                            </a:rPr>
+                            <a:t> для распределений с выбросами и сильно не </a:t>
+                          </a:r>
+                          <a:r>
+                            <a:rPr lang="ru-RU" sz="2000" b="0" i="0" kern="1200" dirty="0" err="1">
+                              <a:solidFill>
+                                <a:schemeClr val="dk1"/>
+                              </a:solidFill>
+                              <a:effectLst/>
+                              <a:latin typeface="+mn-lt"/>
+                              <a:ea typeface="+mn-ea"/>
+                              <a:cs typeface="+mn-cs"/>
+                            </a:rPr>
+                            <a:t>стац</a:t>
+                          </a:r>
+                          <a:r>
+                            <a:rPr lang="ru-RU" sz="2000" b="0" i="0" kern="1200" dirty="0">
+                              <a:solidFill>
+                                <a:schemeClr val="dk1"/>
+                              </a:solidFill>
+                              <a:effectLst/>
+                              <a:latin typeface="+mn-lt"/>
+                              <a:ea typeface="+mn-ea"/>
+                              <a:cs typeface="+mn-cs"/>
+                            </a:rPr>
+                            <a:t>.</a:t>
+                          </a:r>
+                          <a:endParaRPr lang="ru-RU" sz="2000" dirty="0"/>
+                        </a:p>
+                      </a:txBody>
+                      <a:tcPr/>
+                    </a:tc>
+                    <a:extLst>
+                      <a:ext uri="{0D108BD9-81ED-4DB2-BD59-A6C34878D82A}">
+                        <a16:rowId xmlns:a16="http://schemas.microsoft.com/office/drawing/2014/main" val="2793548672"/>
+                      </a:ext>
+                    </a:extLst>
+                  </a:tr>
+                  <a:tr h="1056640">
+                    <a:tc>
+                      <a:txBody>
+                        <a:bodyPr/>
+                        <a:lstStyle/>
+                        <a:p>
+                          <a:pPr algn="ctr"/>
+                          <a:r>
+                            <a:rPr lang="ru-RU" sz="2000" dirty="0"/>
+                            <a:t>Проверка на выбросы</a:t>
+                          </a:r>
+                        </a:p>
+                      </a:txBody>
+                      <a:tcPr/>
+                    </a:tc>
+                    <a:tc>
+                      <a:txBody>
+                        <a:bodyPr/>
+                        <a:lstStyle/>
+                        <a:p>
+                          <a:pPr algn="ctr"/>
+                          <a:r>
+                            <a:rPr lang="ru-RU" sz="2000" b="0" i="0" kern="1200" dirty="0">
+                              <a:solidFill>
+                                <a:schemeClr val="dk1"/>
+                              </a:solidFill>
+                              <a:effectLst/>
+                              <a:latin typeface="+mn-lt"/>
+                              <a:ea typeface="+mn-ea"/>
+                              <a:cs typeface="+mn-cs"/>
+                            </a:rPr>
+                            <a:t>Выбросы-  ложные корреляции</a:t>
+                          </a:r>
+                        </a:p>
+                        <a:p>
+                          <a:pPr algn="ctr"/>
+                          <a:r>
+                            <a:rPr lang="ru-RU" sz="2000" b="0" i="0" kern="1200" dirty="0">
+                              <a:solidFill>
+                                <a:schemeClr val="dk1"/>
+                              </a:solidFill>
+                              <a:effectLst/>
+                              <a:latin typeface="+mn-lt"/>
+                              <a:ea typeface="+mn-ea"/>
+                              <a:cs typeface="+mn-cs"/>
+                            </a:rPr>
+                            <a:t>Дают смещение результатов</a:t>
+                          </a:r>
+                        </a:p>
+                      </a:txBody>
+                      <a:tcPr/>
+                    </a:tc>
+                    <a:tc>
+                      <a:txBody>
+                        <a:bodyPr/>
+                        <a:lstStyle/>
+                        <a:p>
+                          <a:endParaRPr lang="ru-RU"/>
+                        </a:p>
+                      </a:txBody>
+                      <a:tcPr>
+                        <a:blipFill>
+                          <a:blip r:embed="rId3"/>
+                          <a:stretch>
+                            <a:fillRect l="-89655" t="-263218" r="-394" b="-204598"/>
+                          </a:stretch>
+                        </a:blipFill>
+                      </a:tcPr>
+                    </a:tc>
+                    <a:extLst>
+                      <a:ext uri="{0D108BD9-81ED-4DB2-BD59-A6C34878D82A}">
+                        <a16:rowId xmlns:a16="http://schemas.microsoft.com/office/drawing/2014/main" val="783984968"/>
+                      </a:ext>
+                    </a:extLst>
+                  </a:tr>
+                  <a:tr h="1031240">
+                    <a:tc>
+                      <a:txBody>
+                        <a:bodyPr/>
+                        <a:lstStyle/>
+                        <a:p>
+                          <a:pPr algn="ctr"/>
+                          <a:r>
+                            <a:rPr lang="ru-RU" sz="2000" dirty="0" err="1"/>
+                            <a:t>Кроссвалидация</a:t>
+                          </a:r>
+                          <a:endParaRPr lang="ru-RU" sz="2000" dirty="0"/>
+                        </a:p>
+                      </a:txBody>
+                      <a:tcPr/>
+                    </a:tc>
+                    <a:tc>
+                      <a:txBody>
+                        <a:bodyPr/>
+                        <a:lstStyle/>
+                        <a:p>
+                          <a:pPr algn="ctr"/>
+                          <a:r>
+                            <a:rPr lang="ru-RU" sz="2000" b="0" i="0" kern="1200" dirty="0">
+                              <a:solidFill>
+                                <a:schemeClr val="dk1"/>
+                              </a:solidFill>
+                              <a:effectLst/>
+                              <a:latin typeface="+mn-lt"/>
+                              <a:ea typeface="+mn-ea"/>
+                              <a:cs typeface="+mn-cs"/>
+                            </a:rPr>
+                            <a:t>Только последовательно!</a:t>
+                          </a:r>
+                        </a:p>
+                        <a:p>
+                          <a:pPr algn="ctr"/>
+                          <a:r>
+                            <a:rPr lang="ru-RU" sz="2000" b="0" i="0" kern="1200" dirty="0">
+                              <a:solidFill>
+                                <a:schemeClr val="dk1"/>
+                              </a:solidFill>
+                              <a:effectLst/>
+                              <a:latin typeface="+mn-lt"/>
+                              <a:ea typeface="+mn-ea"/>
+                              <a:cs typeface="+mn-cs"/>
+                            </a:rPr>
+                            <a:t>Возможность утечки данных</a:t>
+                          </a:r>
+                        </a:p>
+                      </a:txBody>
+                      <a:tcPr/>
+                    </a:tc>
+                    <a:tc>
+                      <a:txBody>
+                        <a:bodyPr/>
+                        <a:lstStyle/>
+                        <a:p>
+                          <a:pPr marL="285750" indent="-285750" algn="l">
+                            <a:spcBef>
+                              <a:spcPts val="200"/>
+                            </a:spcBef>
+                            <a:buFont typeface="Arial" panose="020B0604020202020204" pitchFamily="34" charset="0"/>
+                            <a:buChar char="•"/>
+                          </a:pPr>
+                          <a:r>
+                            <a:rPr lang="ru-RU" sz="2000" b="0" i="0" kern="1200" dirty="0">
+                              <a:solidFill>
+                                <a:schemeClr val="dk1"/>
+                              </a:solidFill>
+                              <a:effectLst/>
+                              <a:latin typeface="+mn-lt"/>
+                              <a:ea typeface="+mn-ea"/>
+                              <a:cs typeface="+mn-cs"/>
+                            </a:rPr>
+                            <a:t>Проверяйте на утечку, </a:t>
+                          </a:r>
+                        </a:p>
+                        <a:p>
+                          <a:pPr marL="285750" indent="-285750" algn="l">
+                            <a:spcBef>
+                              <a:spcPts val="200"/>
+                            </a:spcBef>
+                            <a:buFont typeface="Arial" panose="020B0604020202020204" pitchFamily="34" charset="0"/>
+                            <a:buChar char="•"/>
+                          </a:pPr>
+                          <a:r>
+                            <a:rPr lang="ru-RU" sz="2000" b="0" i="0" kern="1200" dirty="0">
+                              <a:solidFill>
+                                <a:schemeClr val="dk1"/>
+                              </a:solidFill>
+                              <a:effectLst/>
+                              <a:latin typeface="+mn-lt"/>
+                              <a:ea typeface="+mn-ea"/>
+                              <a:cs typeface="+mn-cs"/>
+                            </a:rPr>
+                            <a:t>Лучше сначала делить данные потом преобразовывать признаки</a:t>
+                          </a:r>
+                          <a:endParaRPr lang="el-GR" sz="2000" b="0" i="0" kern="1200" dirty="0">
+                            <a:solidFill>
+                              <a:schemeClr val="dk1"/>
+                            </a:solidFill>
+                            <a:effectLst/>
+                            <a:latin typeface="+mn-lt"/>
+                            <a:ea typeface="+mn-ea"/>
+                            <a:cs typeface="+mn-cs"/>
+                          </a:endParaRPr>
+                        </a:p>
+                      </a:txBody>
+                      <a:tcPr/>
+                    </a:tc>
+                    <a:extLst>
+                      <a:ext uri="{0D108BD9-81ED-4DB2-BD59-A6C34878D82A}">
+                        <a16:rowId xmlns:a16="http://schemas.microsoft.com/office/drawing/2014/main" val="87516275"/>
+                      </a:ext>
+                    </a:extLst>
+                  </a:tr>
+                  <a:tr h="1031240">
+                    <a:tc>
+                      <a:txBody>
+                        <a:bodyPr/>
+                        <a:lstStyle/>
+                        <a:p>
+                          <a:pPr algn="ctr"/>
+                          <a:r>
+                            <a:rPr lang="ru-RU" sz="2000" dirty="0"/>
+                            <a:t>Экзогенные факторы</a:t>
+                          </a:r>
+                        </a:p>
+                      </a:txBody>
+                      <a:tcPr/>
+                    </a:tc>
+                    <a:tc>
+                      <a:txBody>
+                        <a:bodyPr/>
+                        <a:lstStyle/>
+                        <a:p>
+                          <a:pPr algn="ctr"/>
+                          <a:r>
+                            <a:rPr lang="ru-RU" sz="2000" b="0" i="0" kern="1200" dirty="0">
+                              <a:solidFill>
+                                <a:schemeClr val="dk1"/>
+                              </a:solidFill>
+                              <a:effectLst/>
+                              <a:latin typeface="+mn-lt"/>
+                              <a:ea typeface="+mn-ea"/>
+                              <a:cs typeface="+mn-cs"/>
+                            </a:rPr>
+                            <a:t>Действительно экзогенные?</a:t>
+                          </a:r>
+                        </a:p>
+                        <a:p>
+                          <a:pPr algn="ctr"/>
+                          <a:r>
+                            <a:rPr lang="ru-RU" sz="2000" b="0" i="0" kern="1200" dirty="0">
+                              <a:solidFill>
+                                <a:schemeClr val="dk1"/>
+                              </a:solidFill>
+                              <a:effectLst/>
+                              <a:latin typeface="+mn-lt"/>
+                              <a:ea typeface="+mn-ea"/>
+                              <a:cs typeface="+mn-cs"/>
+                            </a:rPr>
+                            <a:t>Утечка факторов</a:t>
+                          </a:r>
+                        </a:p>
+                      </a:txBody>
+                      <a:tcPr/>
+                    </a:tc>
+                    <a:tc>
+                      <a:txBody>
+                        <a:bodyPr/>
+                        <a:lstStyle/>
+                        <a:p>
+                          <a:pPr marL="285750" indent="-285750" algn="l">
+                            <a:spcBef>
+                              <a:spcPts val="200"/>
+                            </a:spcBef>
+                            <a:buFont typeface="Arial" panose="020B0604020202020204" pitchFamily="34" charset="0"/>
+                            <a:buChar char="•"/>
+                          </a:pPr>
+                          <a:r>
+                            <a:rPr lang="ru-RU" sz="2000" b="0" i="0" kern="1200" dirty="0">
+                              <a:solidFill>
+                                <a:schemeClr val="dk1"/>
+                              </a:solidFill>
+                              <a:effectLst/>
+                              <a:latin typeface="+mn-lt"/>
+                              <a:ea typeface="+mn-ea"/>
+                              <a:cs typeface="+mn-cs"/>
+                            </a:rPr>
+                            <a:t>Проверяйте необходимость факторов</a:t>
+                          </a:r>
+                        </a:p>
+                        <a:p>
+                          <a:pPr marL="285750" indent="-285750" algn="l">
+                            <a:spcBef>
+                              <a:spcPts val="200"/>
+                            </a:spcBef>
+                            <a:buFont typeface="Arial" panose="020B0604020202020204" pitchFamily="34" charset="0"/>
+                            <a:buChar char="•"/>
+                          </a:pPr>
+                          <a:r>
+                            <a:rPr lang="ru-RU" sz="2000" b="0" i="0" kern="1200" dirty="0">
+                              <a:solidFill>
+                                <a:schemeClr val="dk1"/>
+                              </a:solidFill>
+                              <a:effectLst/>
+                              <a:latin typeface="+mn-lt"/>
+                              <a:ea typeface="+mn-ea"/>
+                              <a:cs typeface="+mn-cs"/>
+                            </a:rPr>
+                            <a:t>Проверяйте на утечки и наличие значений в рабочем режиме</a:t>
+                          </a:r>
+                          <a:endParaRPr lang="el-GR" sz="2000" b="0" i="0" kern="1200" dirty="0">
+                            <a:solidFill>
+                              <a:schemeClr val="dk1"/>
+                            </a:solidFill>
+                            <a:effectLst/>
+                            <a:latin typeface="+mn-lt"/>
+                            <a:ea typeface="+mn-ea"/>
+                            <a:cs typeface="+mn-cs"/>
+                          </a:endParaRPr>
+                        </a:p>
+                      </a:txBody>
+                      <a:tcPr/>
+                    </a:tc>
+                    <a:extLst>
+                      <a:ext uri="{0D108BD9-81ED-4DB2-BD59-A6C34878D82A}">
+                        <a16:rowId xmlns:a16="http://schemas.microsoft.com/office/drawing/2014/main" val="2886357840"/>
+                      </a:ext>
+                    </a:extLst>
+                  </a:tr>
+                </a:tbl>
+              </a:graphicData>
+            </a:graphic>
+          </p:graphicFrame>
+        </mc:Fallback>
+      </mc:AlternateContent>
     </p:spTree>
     <p:extLst>
       <p:ext uri="{BB962C8B-B14F-4D97-AF65-F5344CB8AC3E}">
@@ -8355,6 +9212,523 @@
 </file>
 
 <file path=ppt/slides/slide19.xml><?xml version="1.0" encoding="utf-8"?>
+<p:sld xmlns:a="http://schemas.openxmlformats.org/drawingml/2006/main" xmlns:r="http://schemas.openxmlformats.org/officeDocument/2006/relationships" xmlns:p="http://schemas.openxmlformats.org/presentationml/2006/main">
+  <p:cSld>
+    <p:spTree>
+      <p:nvGrpSpPr>
+        <p:cNvPr id="1" name=""/>
+        <p:cNvGrpSpPr/>
+        <p:nvPr/>
+      </p:nvGrpSpPr>
+      <p:grpSpPr>
+        <a:xfrm>
+          <a:off x="0" y="0"/>
+          <a:ext cx="0" cy="0"/>
+          <a:chOff x="0" y="0"/>
+          <a:chExt cx="0" cy="0"/>
+        </a:xfrm>
+      </p:grpSpPr>
+      <p:sp>
+        <p:nvSpPr>
+          <p:cNvPr id="2" name="Заголовок 1"/>
+          <p:cNvSpPr>
+            <a:spLocks noGrp="1"/>
+          </p:cNvSpPr>
+          <p:nvPr>
+            <p:ph type="title"/>
+          </p:nvPr>
+        </p:nvSpPr>
+        <p:spPr>
+          <a:xfrm>
+            <a:off x="292100" y="269875"/>
+            <a:ext cx="11061700" cy="790575"/>
+          </a:xfrm>
+        </p:spPr>
+        <p:txBody>
+          <a:bodyPr/>
+          <a:lstStyle/>
+          <a:p>
+            <a:pPr algn="ctr"/>
+            <a:r>
+              <a:rPr lang="ru-RU" dirty="0" smtClean="0"/>
+              <a:t>Вопросы для самоконтроля</a:t>
+            </a:r>
+            <a:endParaRPr lang="ru-RU" dirty="0"/>
+          </a:p>
+        </p:txBody>
+      </p:sp>
+      <p:sp>
+        <p:nvSpPr>
+          <p:cNvPr id="3" name="Объект 2"/>
+          <p:cNvSpPr>
+            <a:spLocks noGrp="1"/>
+          </p:cNvSpPr>
+          <p:nvPr>
+            <p:ph idx="1"/>
+          </p:nvPr>
+        </p:nvSpPr>
+        <p:spPr>
+          <a:xfrm>
+            <a:off x="292100" y="1060450"/>
+            <a:ext cx="11442700" cy="5283200"/>
+          </a:xfrm>
+        </p:spPr>
+        <p:txBody>
+          <a:bodyPr/>
+          <a:lstStyle/>
+          <a:p>
+            <a:pPr lvl="0" algn="just"/>
+            <a:r>
+              <a:rPr lang="ru-RU" sz="2400" dirty="0"/>
+              <a:t>Назовите основные отличия использования методов классического машинного обучения от статистических методов. Какие основные подходы к применению методом машинного обучения есть и когда их стоит использовать. Приведите примеры задач где необходимо использовать методы машинного обучения</a:t>
+            </a:r>
+            <a:r>
+              <a:rPr lang="ru-RU" sz="2400" dirty="0" smtClean="0"/>
+              <a:t>.</a:t>
+            </a:r>
+          </a:p>
+          <a:p>
+            <a:pPr lvl="0" algn="just"/>
+            <a:r>
+              <a:rPr lang="ru-RU" sz="2400" dirty="0"/>
+              <a:t>Приведите примеры экзогенных факторов в различных </a:t>
+            </a:r>
+            <a:r>
+              <a:rPr lang="ru-RU" sz="2400" dirty="0" smtClean="0"/>
+              <a:t>задачах. Объясните </a:t>
+            </a:r>
+            <a:r>
+              <a:rPr lang="ru-RU" sz="2400" dirty="0"/>
+              <a:t>как их использовать </a:t>
+            </a:r>
+            <a:r>
+              <a:rPr lang="ru-RU" sz="2400" dirty="0" smtClean="0"/>
+              <a:t>экзогенные факторы в моделях машинного обучения, как отбирать эти факторы. </a:t>
+            </a:r>
+          </a:p>
+          <a:p>
+            <a:pPr lvl="0" algn="just"/>
+            <a:r>
+              <a:rPr lang="ru-RU" sz="2400" dirty="0" smtClean="0"/>
+              <a:t>Выберите задачу анализа ВР. Распишите </a:t>
+            </a:r>
+            <a:r>
+              <a:rPr lang="ru-RU" sz="2400" dirty="0" err="1" smtClean="0"/>
+              <a:t>пайплайн</a:t>
+            </a:r>
+            <a:r>
+              <a:rPr lang="ru-RU" sz="2400" dirty="0" smtClean="0"/>
+              <a:t> решения задачи анализа ВР при помощи МО. Обоснуйте свой выбор. Укажите какие тут могут быть проблемы анализа остатков ВР. Предложите методы диагностики.</a:t>
+            </a:r>
+          </a:p>
+          <a:p>
+            <a:pPr lvl="0" algn="just"/>
+            <a:r>
+              <a:rPr lang="ru-RU" sz="2400" dirty="0" smtClean="0"/>
+              <a:t>Предположите какие особенности задачи регрессии ВР и ее решения могут быть анализируя задачу предсказаний. Приведите примеры задач, подходящих для </a:t>
+            </a:r>
+            <a:r>
+              <a:rPr lang="ru-RU" sz="2400" smtClean="0"/>
+              <a:t>указанного подхода.</a:t>
+            </a:r>
+            <a:endParaRPr lang="ru-RU" sz="2400" dirty="0"/>
+          </a:p>
+          <a:p>
+            <a:endParaRPr lang="ru-RU" dirty="0"/>
+          </a:p>
+        </p:txBody>
+      </p:sp>
+    </p:spTree>
+    <p:extLst>
+      <p:ext uri="{BB962C8B-B14F-4D97-AF65-F5344CB8AC3E}">
+        <p14:creationId xmlns:p14="http://schemas.microsoft.com/office/powerpoint/2010/main" val="6507668"/>
+      </p:ext>
+    </p:extLst>
+  </p:cSld>
+  <p:clrMapOvr>
+    <a:masterClrMapping/>
+  </p:clrMapOvr>
+</p:sld>
+</file>
+
+<file path=ppt/slides/slide2.xml><?xml version="1.0" encoding="utf-8"?>
+<p:sld xmlns:a="http://schemas.openxmlformats.org/drawingml/2006/main" xmlns:r="http://schemas.openxmlformats.org/officeDocument/2006/relationships" xmlns:p="http://schemas.openxmlformats.org/presentationml/2006/main">
+  <p:cSld>
+    <p:spTree>
+      <p:nvGrpSpPr>
+        <p:cNvPr id="1" name=""/>
+        <p:cNvGrpSpPr/>
+        <p:nvPr/>
+      </p:nvGrpSpPr>
+      <p:grpSpPr>
+        <a:xfrm>
+          <a:off x="0" y="0"/>
+          <a:ext cx="0" cy="0"/>
+          <a:chOff x="0" y="0"/>
+          <a:chExt cx="0" cy="0"/>
+        </a:xfrm>
+      </p:grpSpPr>
+      <p:sp>
+        <p:nvSpPr>
+          <p:cNvPr id="2" name="Заголовок 1"/>
+          <p:cNvSpPr>
+            <a:spLocks noGrp="1"/>
+          </p:cNvSpPr>
+          <p:nvPr>
+            <p:ph type="title"/>
+          </p:nvPr>
+        </p:nvSpPr>
+        <p:spPr>
+          <a:xfrm>
+            <a:off x="161925" y="155576"/>
+            <a:ext cx="11820525" cy="806450"/>
+          </a:xfrm>
+        </p:spPr>
+        <p:txBody>
+          <a:bodyPr/>
+          <a:lstStyle/>
+          <a:p>
+            <a:pPr algn="ctr"/>
+            <a:r>
+              <a:rPr lang="ru-RU" dirty="0"/>
+              <a:t>Почему невсегда статистические методы</a:t>
+            </a:r>
+          </a:p>
+        </p:txBody>
+      </p:sp>
+      <p:sp>
+        <p:nvSpPr>
+          <p:cNvPr id="3" name="Объект 2"/>
+          <p:cNvSpPr>
+            <a:spLocks noGrp="1"/>
+          </p:cNvSpPr>
+          <p:nvPr>
+            <p:ph idx="1"/>
+          </p:nvPr>
+        </p:nvSpPr>
+        <p:spPr>
+          <a:xfrm>
+            <a:off x="228600" y="838200"/>
+            <a:ext cx="11887200" cy="5562600"/>
+          </a:xfrm>
+        </p:spPr>
+        <p:txBody>
+          <a:bodyPr>
+            <a:noAutofit/>
+          </a:bodyPr>
+          <a:lstStyle/>
+          <a:p>
+            <a:pPr marL="0" indent="0" eaLnBrk="0" fontAlgn="base" hangingPunct="0">
+              <a:lnSpc>
+                <a:spcPct val="100000"/>
+              </a:lnSpc>
+              <a:spcBef>
+                <a:spcPts val="600"/>
+              </a:spcBef>
+              <a:spcAft>
+                <a:spcPct val="0"/>
+              </a:spcAft>
+              <a:buNone/>
+            </a:pPr>
+            <a:r>
+              <a:rPr lang="ru-RU" altLang="ru-RU" sz="2100" dirty="0"/>
+              <a:t>Часто при построении моделей </a:t>
+            </a:r>
+            <a:r>
+              <a:rPr lang="ru-RU" altLang="ru-RU" sz="2100" dirty="0" err="1"/>
+              <a:t>прогназирования</a:t>
+            </a:r>
+            <a:r>
+              <a:rPr lang="ru-RU" altLang="ru-RU" sz="2100" dirty="0"/>
+              <a:t> ВР приходится руководствоваться принципом скорости. </a:t>
+            </a:r>
+          </a:p>
+          <a:p>
+            <a:pPr marL="0" lvl="0" indent="0" eaLnBrk="0" fontAlgn="base" hangingPunct="0">
+              <a:lnSpc>
+                <a:spcPct val="100000"/>
+              </a:lnSpc>
+              <a:spcBef>
+                <a:spcPts val="600"/>
+              </a:spcBef>
+              <a:spcAft>
+                <a:spcPct val="0"/>
+              </a:spcAft>
+              <a:buNone/>
+            </a:pPr>
+            <a:r>
+              <a:rPr lang="ru-RU" altLang="ru-RU" sz="2100" dirty="0"/>
+              <a:t>Основные </a:t>
+            </a:r>
+            <a:r>
+              <a:rPr lang="ru-RU" altLang="ru-RU" sz="2100" b="1" dirty="0"/>
+              <a:t>недостатками</a:t>
+            </a:r>
+            <a:r>
+              <a:rPr lang="ru-RU" altLang="ru-RU" sz="2100" dirty="0"/>
+              <a:t> моделей</a:t>
+            </a:r>
+            <a:r>
+              <a:rPr lang="en-US" altLang="ru-RU" sz="2100" dirty="0"/>
+              <a:t> SARIMA, ETS </a:t>
+            </a:r>
+            <a:r>
+              <a:rPr lang="ru-RU" altLang="ru-RU" sz="2100" dirty="0"/>
+              <a:t>и других стат. моделей :</a:t>
+            </a:r>
+            <a:endParaRPr kumimoji="0" lang="ru-RU" altLang="ru-RU" sz="2100" b="0" i="0" u="none" strike="noStrike" cap="none" normalizeH="0" baseline="0" dirty="0">
+              <a:ln>
+                <a:noFill/>
+              </a:ln>
+              <a:solidFill>
+                <a:schemeClr val="tx1"/>
+              </a:solidFill>
+              <a:effectLst/>
+            </a:endParaRPr>
+          </a:p>
+          <a:p>
+            <a:pPr lvl="1" eaLnBrk="0" fontAlgn="base" hangingPunct="0">
+              <a:lnSpc>
+                <a:spcPct val="100000"/>
+              </a:lnSpc>
+              <a:spcBef>
+                <a:spcPts val="600"/>
+              </a:spcBef>
+              <a:spcAft>
+                <a:spcPct val="0"/>
+              </a:spcAft>
+            </a:pPr>
+            <a:r>
+              <a:rPr lang="ru-RU" altLang="ru-RU" sz="2100" dirty="0"/>
+              <a:t>Сложность предварительного анализа и подготовки данных.</a:t>
+            </a:r>
+          </a:p>
+          <a:p>
+            <a:pPr lvl="1" eaLnBrk="0" fontAlgn="base" hangingPunct="0">
+              <a:lnSpc>
+                <a:spcPct val="100000"/>
+              </a:lnSpc>
+              <a:spcBef>
+                <a:spcPts val="600"/>
+              </a:spcBef>
+              <a:spcAft>
+                <a:spcPct val="0"/>
+              </a:spcAft>
+            </a:pPr>
+            <a:r>
+              <a:rPr lang="ru-RU" altLang="ru-RU" sz="2100" dirty="0"/>
+              <a:t>Трудно настраиваемы параметры моделей. </a:t>
+            </a:r>
+          </a:p>
+          <a:p>
+            <a:pPr lvl="1" eaLnBrk="0" fontAlgn="base" hangingPunct="0">
+              <a:lnSpc>
+                <a:spcPct val="100000"/>
+              </a:lnSpc>
+              <a:spcBef>
+                <a:spcPts val="600"/>
+              </a:spcBef>
+              <a:spcAft>
+                <a:spcPct val="0"/>
+              </a:spcAft>
+            </a:pPr>
+            <a:r>
+              <a:rPr lang="ru-RU" altLang="ru-RU" sz="2100" dirty="0"/>
+              <a:t>Необходимость частого дообучения\переобучения с новыми </a:t>
+            </a:r>
+            <a:r>
+              <a:rPr lang="ru-RU" altLang="ru-RU" sz="2100" dirty="0" err="1"/>
+              <a:t>гиперпараметрами</a:t>
+            </a:r>
+            <a:r>
+              <a:rPr lang="ru-RU" altLang="ru-RU" sz="2100" dirty="0"/>
+              <a:t>.</a:t>
+            </a:r>
+          </a:p>
+          <a:p>
+            <a:pPr lvl="1" eaLnBrk="0" fontAlgn="base" hangingPunct="0">
+              <a:lnSpc>
+                <a:spcPct val="100000"/>
+              </a:lnSpc>
+              <a:spcBef>
+                <a:spcPts val="600"/>
+              </a:spcBef>
+              <a:spcAft>
+                <a:spcPct val="0"/>
+              </a:spcAft>
+            </a:pPr>
+            <a:r>
+              <a:rPr lang="ru-RU" altLang="ru-RU" sz="2100" dirty="0"/>
+              <a:t>Авто настройка не дает высоко-точных результатов без ручной </a:t>
+            </a:r>
+            <a:r>
+              <a:rPr lang="ru-RU" altLang="ru-RU" sz="2100" dirty="0" err="1"/>
+              <a:t>донастройки</a:t>
+            </a:r>
+            <a:r>
+              <a:rPr lang="ru-RU" altLang="ru-RU" sz="2100" dirty="0"/>
+              <a:t>.</a:t>
+            </a:r>
+          </a:p>
+          <a:p>
+            <a:pPr marL="0" lvl="0" indent="0" eaLnBrk="0" fontAlgn="base" hangingPunct="0">
+              <a:lnSpc>
+                <a:spcPct val="120000"/>
+              </a:lnSpc>
+              <a:spcBef>
+                <a:spcPts val="600"/>
+              </a:spcBef>
+              <a:spcAft>
+                <a:spcPct val="0"/>
+              </a:spcAft>
+              <a:buFontTx/>
+              <a:buChar char="•"/>
+            </a:pPr>
+            <a:r>
+              <a:rPr lang="ru-RU" altLang="ru-RU" sz="2100" dirty="0"/>
+              <a:t> </a:t>
+            </a:r>
+            <a:r>
+              <a:rPr lang="ru-RU" altLang="ru-RU" sz="2100" u="sng" dirty="0"/>
+              <a:t>На практике при работе с большими объемами ВР и длинными горизонтами предсказания  - при массовых не прецизионных прогнозах дешевле и быстрее выбрать несколько признаков из имеющегося временного ряда и построить простую линейную регрессионную модель или, скажем, случайный лес</a:t>
+            </a:r>
+            <a:r>
+              <a:rPr lang="ru-RU" altLang="ru-RU" sz="2100" dirty="0"/>
+              <a:t>. </a:t>
+            </a:r>
+          </a:p>
+          <a:p>
+            <a:pPr marL="457200" lvl="1" indent="0" eaLnBrk="0" fontAlgn="base" hangingPunct="0">
+              <a:lnSpc>
+                <a:spcPct val="100000"/>
+              </a:lnSpc>
+              <a:spcBef>
+                <a:spcPts val="600"/>
+              </a:spcBef>
+              <a:spcAft>
+                <a:spcPct val="0"/>
+              </a:spcAft>
+              <a:buNone/>
+            </a:pPr>
+            <a:r>
+              <a:rPr lang="ru-RU" altLang="ru-RU" sz="2100" dirty="0"/>
+              <a:t>подход не подкреплен теорией и нарушает ряд предположений (например, теорему Гаусса-Маркова, особенно для некоррелированных ошибок), но он очень полезен на практике и часто используется в соревнованиях по машинному обучению</a:t>
+            </a:r>
+          </a:p>
+          <a:p>
+            <a:pPr marL="0" lvl="0" indent="0" eaLnBrk="0" fontAlgn="base" hangingPunct="0">
+              <a:lnSpc>
+                <a:spcPct val="100000"/>
+              </a:lnSpc>
+              <a:spcBef>
+                <a:spcPts val="600"/>
+              </a:spcBef>
+              <a:spcAft>
+                <a:spcPct val="0"/>
+              </a:spcAft>
+              <a:buNone/>
+            </a:pPr>
+            <a:r>
+              <a:rPr lang="ru-RU" altLang="ru-RU" sz="2100" b="1" dirty="0"/>
+              <a:t>При исследованиях рекомендуется начинать с </a:t>
+            </a:r>
+            <a:r>
+              <a:rPr lang="en-US" altLang="ru-RU" sz="2100" b="1" dirty="0"/>
+              <a:t>ARIMA, ETS </a:t>
+            </a:r>
+            <a:r>
+              <a:rPr lang="ru-RU" altLang="ru-RU" sz="2100" b="1" dirty="0"/>
+              <a:t>как </a:t>
+            </a:r>
+            <a:r>
+              <a:rPr lang="ru-RU" altLang="ru-RU" sz="2100" b="1" dirty="0" err="1"/>
+              <a:t>бейзлайны</a:t>
+            </a:r>
+            <a:endParaRPr kumimoji="0" lang="ru-RU" altLang="ru-RU" sz="2100" b="1" i="0" u="none" strike="noStrike" cap="none" normalizeH="0" baseline="0" dirty="0">
+              <a:ln>
+                <a:noFill/>
+              </a:ln>
+              <a:solidFill>
+                <a:schemeClr val="tx1"/>
+              </a:solidFill>
+              <a:effectLst/>
+            </a:endParaRPr>
+          </a:p>
+          <a:p>
+            <a:endParaRPr lang="ru-RU" sz="2100" dirty="0"/>
+          </a:p>
+        </p:txBody>
+      </p:sp>
+      <p:sp>
+        <p:nvSpPr>
+          <p:cNvPr id="4" name="Прямоугольник 3"/>
+          <p:cNvSpPr/>
+          <p:nvPr/>
+        </p:nvSpPr>
+        <p:spPr>
+          <a:xfrm>
+            <a:off x="6072187" y="6550223"/>
+            <a:ext cx="6096000" cy="307777"/>
+          </a:xfrm>
+          <a:prstGeom prst="rect">
+            <a:avLst/>
+          </a:prstGeom>
+        </p:spPr>
+        <p:txBody>
+          <a:bodyPr>
+            <a:spAutoFit/>
+          </a:bodyPr>
+          <a:lstStyle/>
+          <a:p>
+            <a:r>
+              <a:rPr lang="ru-RU" sz="1400" dirty="0"/>
+              <a:t>https://mlcourse.ai/book/topic09/topic9_part1_time_series_python.html</a:t>
+            </a:r>
+          </a:p>
+        </p:txBody>
+      </p:sp>
+      <p:sp>
+        <p:nvSpPr>
+          <p:cNvPr id="5" name="Прямоугольник 4"/>
+          <p:cNvSpPr/>
+          <p:nvPr/>
+        </p:nvSpPr>
+        <p:spPr>
+          <a:xfrm>
+            <a:off x="0" y="6550222"/>
+            <a:ext cx="4082080" cy="307777"/>
+          </a:xfrm>
+          <a:prstGeom prst="rect">
+            <a:avLst/>
+          </a:prstGeom>
+        </p:spPr>
+        <p:txBody>
+          <a:bodyPr wrap="none">
+            <a:spAutoFit/>
+          </a:bodyPr>
+          <a:lstStyle/>
+          <a:p>
+            <a:r>
+              <a:rPr lang="ru-RU" sz="1400" dirty="0"/>
+              <a:t>https://blogs.cisco.com/analytics-automation/arima3</a:t>
+            </a:r>
+          </a:p>
+        </p:txBody>
+      </p:sp>
+    </p:spTree>
+    <p:extLst>
+      <p:ext uri="{BB962C8B-B14F-4D97-AF65-F5344CB8AC3E}">
+        <p14:creationId xmlns:p14="http://schemas.microsoft.com/office/powerpoint/2010/main" val="3372900399"/>
+      </p:ext>
+    </p:extLst>
+  </p:cSld>
+  <p:clrMapOvr>
+    <a:masterClrMapping/>
+  </p:clrMapOvr>
+</p:sld>
+</file>
+
+<file path=ppt/slides/slide20.xml><?xml version="1.0" encoding="utf-8"?>
 <p:sld xmlns:a="http://schemas.openxmlformats.org/drawingml/2006/main" xmlns:r="http://schemas.openxmlformats.org/officeDocument/2006/relationships" xmlns:p="http://schemas.openxmlformats.org/presentationml/2006/main" show="0">
   <p:cSld>
     <p:spTree>
@@ -8527,390 +9901,14 @@
   <p:clrMapOvr>
     <a:masterClrMapping/>
   </p:clrMapOvr>
-  <mc:AlternateContent xmlns:mc="http://schemas.openxmlformats.org/markup-compatibility/2006">
-    <mc:Choice xmlns:p14="http://schemas.microsoft.com/office/powerpoint/2010/main" Requires="p14">
+  <mc:AlternateContent xmlns:mc="http://schemas.openxmlformats.org/markup-compatibility/2006" xmlns:p14="http://schemas.microsoft.com/office/powerpoint/2010/main">
+    <mc:Choice Requires="p14">
       <p:transition spd="slow" p14:dur="2000"/>
     </mc:Choice>
-    <mc:Fallback>
+    <mc:Fallback xmlns="">
       <p:transition spd="slow"/>
     </mc:Fallback>
   </mc:AlternateContent>
-</p:sld>
-</file>
-
-<file path=ppt/slides/slide2.xml><?xml version="1.0" encoding="utf-8"?>
-<p:sld xmlns:a="http://schemas.openxmlformats.org/drawingml/2006/main" xmlns:r="http://schemas.openxmlformats.org/officeDocument/2006/relationships" xmlns:p="http://schemas.openxmlformats.org/presentationml/2006/main">
-  <p:cSld>
-    <p:spTree>
-      <p:nvGrpSpPr>
-        <p:cNvPr id="1" name=""/>
-        <p:cNvGrpSpPr/>
-        <p:nvPr/>
-      </p:nvGrpSpPr>
-      <p:grpSpPr>
-        <a:xfrm>
-          <a:off x="0" y="0"/>
-          <a:ext cx="0" cy="0"/>
-          <a:chOff x="0" y="0"/>
-          <a:chExt cx="0" cy="0"/>
-        </a:xfrm>
-      </p:grpSpPr>
-      <p:sp>
-        <p:nvSpPr>
-          <p:cNvPr id="2" name="Заголовок 1"/>
-          <p:cNvSpPr>
-            <a:spLocks noGrp="1"/>
-          </p:cNvSpPr>
-          <p:nvPr>
-            <p:ph type="title"/>
-          </p:nvPr>
-        </p:nvSpPr>
-        <p:spPr>
-          <a:xfrm>
-            <a:off x="161925" y="155576"/>
-            <a:ext cx="11820525" cy="806450"/>
-          </a:xfrm>
-        </p:spPr>
-        <p:txBody>
-          <a:bodyPr/>
-          <a:lstStyle/>
-          <a:p>
-            <a:r>
-              <a:rPr lang="ru-RU" dirty="0"/>
-              <a:t>Почему невсегда статистические методы</a:t>
-            </a:r>
-          </a:p>
-        </p:txBody>
-      </p:sp>
-      <p:sp>
-        <p:nvSpPr>
-          <p:cNvPr id="3" name="Объект 2"/>
-          <p:cNvSpPr>
-            <a:spLocks noGrp="1"/>
-          </p:cNvSpPr>
-          <p:nvPr>
-            <p:ph idx="1"/>
-          </p:nvPr>
-        </p:nvSpPr>
-        <p:spPr>
-          <a:xfrm>
-            <a:off x="228600" y="838200"/>
-            <a:ext cx="11887200" cy="5562600"/>
-          </a:xfrm>
-        </p:spPr>
-        <p:txBody>
-          <a:bodyPr>
-            <a:noAutofit/>
-          </a:bodyPr>
-          <a:lstStyle/>
-          <a:p>
-            <a:pPr marL="0" indent="0" eaLnBrk="0" fontAlgn="base" hangingPunct="0">
-              <a:lnSpc>
-                <a:spcPct val="100000"/>
-              </a:lnSpc>
-              <a:spcBef>
-                <a:spcPts val="600"/>
-              </a:spcBef>
-              <a:spcAft>
-                <a:spcPct val="0"/>
-              </a:spcAft>
-              <a:buNone/>
-            </a:pPr>
-            <a:r>
-              <a:rPr lang="ru-RU" altLang="ru-RU" sz="2100" dirty="0"/>
-              <a:t>Часто при построении моделей </a:t>
-            </a:r>
-            <a:r>
-              <a:rPr lang="ru-RU" altLang="ru-RU" sz="2100" dirty="0" err="1"/>
-              <a:t>прогназирования</a:t>
-            </a:r>
-            <a:r>
-              <a:rPr lang="ru-RU" altLang="ru-RU" sz="2100" dirty="0"/>
-              <a:t> ВР приходится руководствоваться принципом скорости. </a:t>
-            </a:r>
-          </a:p>
-          <a:p>
-            <a:pPr marL="0" lvl="0" indent="0" eaLnBrk="0" fontAlgn="base" hangingPunct="0">
-              <a:lnSpc>
-                <a:spcPct val="100000"/>
-              </a:lnSpc>
-              <a:spcBef>
-                <a:spcPts val="600"/>
-              </a:spcBef>
-              <a:spcAft>
-                <a:spcPct val="0"/>
-              </a:spcAft>
-              <a:buNone/>
-            </a:pPr>
-            <a:r>
-              <a:rPr lang="ru-RU" altLang="ru-RU" sz="2100" dirty="0"/>
-              <a:t>Основные </a:t>
-            </a:r>
-            <a:r>
-              <a:rPr lang="ru-RU" altLang="ru-RU" sz="2100" b="1" dirty="0"/>
-              <a:t>недостатками</a:t>
-            </a:r>
-            <a:r>
-              <a:rPr lang="ru-RU" altLang="ru-RU" sz="2100" dirty="0"/>
-              <a:t> моделей</a:t>
-            </a:r>
-            <a:r>
-              <a:rPr lang="en-US" altLang="ru-RU" sz="2100" dirty="0"/>
-              <a:t> SARIMA, ETS </a:t>
-            </a:r>
-            <a:r>
-              <a:rPr lang="ru-RU" altLang="ru-RU" sz="2100" dirty="0"/>
-              <a:t>и других стат. моделей :</a:t>
-            </a:r>
-            <a:endParaRPr kumimoji="0" lang="ru-RU" altLang="ru-RU" sz="2100" b="0" i="0" u="none" strike="noStrike" cap="none" normalizeH="0" baseline="0" dirty="0">
-              <a:ln>
-                <a:noFill/>
-              </a:ln>
-              <a:solidFill>
-                <a:schemeClr val="tx1"/>
-              </a:solidFill>
-              <a:effectLst/>
-            </a:endParaRPr>
-          </a:p>
-          <a:p>
-            <a:pPr lvl="1" eaLnBrk="0" fontAlgn="base" hangingPunct="0">
-              <a:lnSpc>
-                <a:spcPct val="100000"/>
-              </a:lnSpc>
-              <a:spcBef>
-                <a:spcPts val="600"/>
-              </a:spcBef>
-              <a:spcAft>
-                <a:spcPct val="0"/>
-              </a:spcAft>
-            </a:pPr>
-            <a:r>
-              <a:rPr lang="ru-RU" altLang="ru-RU" sz="2100" dirty="0"/>
-              <a:t>Сложность предварительного анализа и подготовки данных.</a:t>
-            </a:r>
-          </a:p>
-          <a:p>
-            <a:pPr lvl="1" eaLnBrk="0" fontAlgn="base" hangingPunct="0">
-              <a:lnSpc>
-                <a:spcPct val="100000"/>
-              </a:lnSpc>
-              <a:spcBef>
-                <a:spcPts val="600"/>
-              </a:spcBef>
-              <a:spcAft>
-                <a:spcPct val="0"/>
-              </a:spcAft>
-            </a:pPr>
-            <a:r>
-              <a:rPr lang="ru-RU" altLang="ru-RU" sz="2100" dirty="0"/>
-              <a:t>Трудно настраиваемы параметры моделей. </a:t>
-            </a:r>
-          </a:p>
-          <a:p>
-            <a:pPr lvl="1" eaLnBrk="0" fontAlgn="base" hangingPunct="0">
-              <a:lnSpc>
-                <a:spcPct val="100000"/>
-              </a:lnSpc>
-              <a:spcBef>
-                <a:spcPts val="600"/>
-              </a:spcBef>
-              <a:spcAft>
-                <a:spcPct val="0"/>
-              </a:spcAft>
-            </a:pPr>
-            <a:r>
-              <a:rPr lang="ru-RU" altLang="ru-RU" sz="2100" dirty="0"/>
-              <a:t>Необходимость частого дообучения\переобучения с новыми </a:t>
-            </a:r>
-            <a:r>
-              <a:rPr lang="ru-RU" altLang="ru-RU" sz="2100" dirty="0" err="1"/>
-              <a:t>гиперпараметрами</a:t>
-            </a:r>
-            <a:r>
-              <a:rPr lang="ru-RU" altLang="ru-RU" sz="2100" dirty="0"/>
-              <a:t>.</a:t>
-            </a:r>
-          </a:p>
-          <a:p>
-            <a:pPr lvl="1" eaLnBrk="0" fontAlgn="base" hangingPunct="0">
-              <a:lnSpc>
-                <a:spcPct val="100000"/>
-              </a:lnSpc>
-              <a:spcBef>
-                <a:spcPts val="600"/>
-              </a:spcBef>
-              <a:spcAft>
-                <a:spcPct val="0"/>
-              </a:spcAft>
-            </a:pPr>
-            <a:r>
-              <a:rPr lang="ru-RU" altLang="ru-RU" sz="2100" dirty="0"/>
-              <a:t>Авто настройка не дает высоко-точных результатов без ручной </a:t>
-            </a:r>
-            <a:r>
-              <a:rPr lang="ru-RU" altLang="ru-RU" sz="2100" dirty="0" err="1"/>
-              <a:t>донастройки</a:t>
-            </a:r>
-            <a:r>
-              <a:rPr lang="ru-RU" altLang="ru-RU" sz="2100" dirty="0"/>
-              <a:t>.</a:t>
-            </a:r>
-          </a:p>
-          <a:p>
-            <a:pPr marL="0" lvl="0" indent="0" eaLnBrk="0" fontAlgn="base" hangingPunct="0">
-              <a:lnSpc>
-                <a:spcPct val="120000"/>
-              </a:lnSpc>
-              <a:spcBef>
-                <a:spcPts val="600"/>
-              </a:spcBef>
-              <a:spcAft>
-                <a:spcPct val="0"/>
-              </a:spcAft>
-              <a:buFontTx/>
-              <a:buChar char="•"/>
-            </a:pPr>
-            <a:r>
-              <a:rPr lang="ru-RU" altLang="ru-RU" sz="2100" dirty="0"/>
-              <a:t> </a:t>
-            </a:r>
-            <a:r>
-              <a:rPr lang="ru-RU" altLang="ru-RU" sz="2100" u="sng" dirty="0"/>
-              <a:t>На практике при работе с большими объемами ВР и длинными горизонтами предсказания  - при массовых не прецизионных прогнозах дешевле и быстрее выбрать несколько признаков из имеющегося временного ряда и построить простую линейную регрессионную модель или, скажем, случайный лес</a:t>
-            </a:r>
-            <a:r>
-              <a:rPr lang="ru-RU" altLang="ru-RU" sz="2100" dirty="0"/>
-              <a:t>. </a:t>
-            </a:r>
-          </a:p>
-          <a:p>
-            <a:pPr marL="457200" lvl="1" indent="0" eaLnBrk="0" fontAlgn="base" hangingPunct="0">
-              <a:lnSpc>
-                <a:spcPct val="100000"/>
-              </a:lnSpc>
-              <a:spcBef>
-                <a:spcPts val="600"/>
-              </a:spcBef>
-              <a:spcAft>
-                <a:spcPct val="0"/>
-              </a:spcAft>
-              <a:buNone/>
-            </a:pPr>
-            <a:r>
-              <a:rPr lang="ru-RU" altLang="ru-RU" sz="2100" dirty="0"/>
-              <a:t>подход не подкреплен теорией и нарушает ряд предположений (например, теорему Гаусса-Маркова, особенно для некоррелированных ошибок), но он очень полезен на практике и часто используется в соревнованиях по машинному обучению</a:t>
-            </a:r>
-          </a:p>
-          <a:p>
-            <a:pPr marL="0" lvl="0" indent="0" eaLnBrk="0" fontAlgn="base" hangingPunct="0">
-              <a:lnSpc>
-                <a:spcPct val="100000"/>
-              </a:lnSpc>
-              <a:spcBef>
-                <a:spcPts val="600"/>
-              </a:spcBef>
-              <a:spcAft>
-                <a:spcPct val="0"/>
-              </a:spcAft>
-              <a:buNone/>
-            </a:pPr>
-            <a:r>
-              <a:rPr lang="ru-RU" altLang="ru-RU" sz="2100" b="1" dirty="0"/>
-              <a:t>При исследованиях рекомендуется начинать с </a:t>
-            </a:r>
-            <a:r>
-              <a:rPr lang="en-US" altLang="ru-RU" sz="2100" b="1" dirty="0"/>
-              <a:t>ARIMA, ETS </a:t>
-            </a:r>
-            <a:r>
-              <a:rPr lang="ru-RU" altLang="ru-RU" sz="2100" b="1" dirty="0"/>
-              <a:t>как </a:t>
-            </a:r>
-            <a:r>
-              <a:rPr lang="ru-RU" altLang="ru-RU" sz="2100" b="1" dirty="0" err="1"/>
-              <a:t>бейзлайны</a:t>
-            </a:r>
-            <a:endParaRPr kumimoji="0" lang="ru-RU" altLang="ru-RU" sz="2100" b="1" i="0" u="none" strike="noStrike" cap="none" normalizeH="0" baseline="0" dirty="0">
-              <a:ln>
-                <a:noFill/>
-              </a:ln>
-              <a:solidFill>
-                <a:schemeClr val="tx1"/>
-              </a:solidFill>
-              <a:effectLst/>
-            </a:endParaRPr>
-          </a:p>
-          <a:p>
-            <a:endParaRPr lang="ru-RU" sz="2100" dirty="0"/>
-          </a:p>
-        </p:txBody>
-      </p:sp>
-      <p:sp>
-        <p:nvSpPr>
-          <p:cNvPr id="4" name="Прямоугольник 3"/>
-          <p:cNvSpPr/>
-          <p:nvPr/>
-        </p:nvSpPr>
-        <p:spPr>
-          <a:xfrm>
-            <a:off x="6072187" y="6550223"/>
-            <a:ext cx="6096000" cy="307777"/>
-          </a:xfrm>
-          <a:prstGeom prst="rect">
-            <a:avLst/>
-          </a:prstGeom>
-        </p:spPr>
-        <p:txBody>
-          <a:bodyPr>
-            <a:spAutoFit/>
-          </a:bodyPr>
-          <a:lstStyle/>
-          <a:p>
-            <a:r>
-              <a:rPr lang="ru-RU" sz="1400" dirty="0"/>
-              <a:t>https://mlcourse.ai/book/topic09/topic9_part1_time_series_python.html</a:t>
-            </a:r>
-          </a:p>
-        </p:txBody>
-      </p:sp>
-      <p:sp>
-        <p:nvSpPr>
-          <p:cNvPr id="5" name="Прямоугольник 4"/>
-          <p:cNvSpPr/>
-          <p:nvPr/>
-        </p:nvSpPr>
-        <p:spPr>
-          <a:xfrm>
-            <a:off x="0" y="6550222"/>
-            <a:ext cx="4082080" cy="307777"/>
-          </a:xfrm>
-          <a:prstGeom prst="rect">
-            <a:avLst/>
-          </a:prstGeom>
-        </p:spPr>
-        <p:txBody>
-          <a:bodyPr wrap="none">
-            <a:spAutoFit/>
-          </a:bodyPr>
-          <a:lstStyle/>
-          <a:p>
-            <a:r>
-              <a:rPr lang="ru-RU" sz="1400" dirty="0"/>
-              <a:t>https://blogs.cisco.com/analytics-automation/arima3</a:t>
-            </a:r>
-          </a:p>
-        </p:txBody>
-      </p:sp>
-    </p:spTree>
-    <p:extLst>
-      <p:ext uri="{BB962C8B-B14F-4D97-AF65-F5344CB8AC3E}">
-        <p14:creationId xmlns:p14="http://schemas.microsoft.com/office/powerpoint/2010/main" val="3372900399"/>
-      </p:ext>
-    </p:extLst>
-  </p:cSld>
-  <p:clrMapOvr>
-    <a:masterClrMapping/>
-  </p:clrMapOvr>
 </p:sld>
 </file>
 
@@ -8953,6 +9951,7 @@
           </a:bodyPr>
           <a:lstStyle/>
           <a:p>
+            <a:pPr algn="ctr"/>
             <a:r>
               <a:rPr lang="ru-RU" dirty="0"/>
               <a:t>ВР и машинное обучение</a:t>
@@ -8973,7 +9972,7 @@
         <p:spPr>
           <a:xfrm>
             <a:off x="147918" y="1162236"/>
-            <a:ext cx="12124764" cy="1446493"/>
+            <a:ext cx="11637682" cy="1446493"/>
           </a:xfrm>
         </p:spPr>
         <p:txBody>
@@ -9024,7 +10023,7 @@
         </p:blipFill>
         <p:spPr>
           <a:xfrm>
-            <a:off x="3704942" y="4476566"/>
+            <a:off x="3443706" y="4477196"/>
             <a:ext cx="8248372" cy="2103529"/>
           </a:xfrm>
           <a:prstGeom prst="rect">
@@ -9047,7 +10046,7 @@
         </p:blipFill>
         <p:spPr>
           <a:xfrm>
-            <a:off x="3944748" y="2582653"/>
+            <a:off x="3563609" y="2614260"/>
             <a:ext cx="8008566" cy="1532965"/>
           </a:xfrm>
           <a:prstGeom prst="rect">
@@ -9092,7 +10091,7 @@
         </p:nvSpPr>
         <p:spPr>
           <a:xfrm>
-            <a:off x="11343298" y="4055222"/>
+            <a:off x="11045076" y="4057500"/>
             <a:ext cx="779059" cy="369332"/>
           </a:xfrm>
           <a:prstGeom prst="rect">
